--- a/11а клас/РС/4. Преработка и постепенни-промени/04. Документиране и коментиране на кода.pptx
+++ b/11а клас/РС/4. Преработка и постепенни-промени/04. Документиране и коментиране на кода.pptx
@@ -2141,7 +2141,29 @@
           <a:bodyPr/>
           <a:lstStyle/>
           <a:p>
+            <a:r>
+              <a:rPr sz="1300"/>
+              <a:t>ПРЕГЛЕД НА СЪДЪРЖАНИЕТО (1 мин.)</a:t>
+            </a:r>
             <a:endParaRPr lang="bg-BG"/>
+          </a:p>
+          <a:p>
+            <a:r>
+              <a:rPr sz="1300"/>
+              <a:t>Не четете точките наред - само посочете с ръка и кажете:</a:t>
+            </a:r>
+          </a:p>
+          <a:p>
+            <a:r>
+              <a:rPr sz="1300"/>
+              <a:t>"Ще минем от теорията (какво е добра документация) към практиката (XML тагове в C#)."</a:t>
+            </a:r>
+          </a:p>
+          <a:p>
+            <a:r>
+              <a:rPr sz="1300"/>
+              <a:t>Акцент: "Ключовата идея е самоописателен код - ще разберете каква е разликата след малко."</a:t>
+            </a:r>
           </a:p>
         </p:txBody>
       </p:sp>
@@ -2226,6 +2248,962 @@
         <p14:creationId xmlns:p14="http://schemas.microsoft.com/office/powerpoint/2010/main" val="4272781246"/>
       </p:ext>
     </p:extLst>
+  </p:cSld>
+  <p:clrMapOvr>
+    <a:masterClrMapping/>
+  </p:clrMapOvr>
+</p:notes>
+</file>
+
+<file path=ppt/notesSlides/notesSlide10.xml><?xml version="1.0" encoding="utf-8"?>
+<p:notes xmlns:a="http://schemas.openxmlformats.org/drawingml/2006/main" xmlns:p="http://schemas.openxmlformats.org/presentationml/2006/main" xmlns:r="http://schemas.openxmlformats.org/officeDocument/2006/relationships">
+  <p:cSld>
+    <p:spTree>
+      <p:nvGrpSpPr>
+        <p:cNvPr id="1" name=""/>
+        <p:cNvGrpSpPr/>
+        <p:nvPr/>
+      </p:nvGrpSpPr>
+      <p:grpSpPr>
+        <a:xfrm>
+          <a:off x="0" y="0"/>
+          <a:ext cx="0" cy="0"/>
+          <a:chOff x="0" y="0"/>
+          <a:chExt cx="0" cy="0"/>
+        </a:xfrm>
+      </p:grpSpPr>
+      <p:sp>
+        <p:nvSpPr>
+          <p:cNvPr id="2" name="Slide Image Placeholder 1"/>
+          <p:cNvSpPr>
+            <a:spLocks noGrp="1"/>
+          </p:cNvSpPr>
+          <p:nvPr>
+            <p:ph type="sldImg" idx="2"/>
+          </p:nvPr>
+        </p:nvSpPr>
+        <p:spPr/>
+      </p:sp>
+      <p:sp>
+        <p:nvSpPr>
+          <p:cNvPr id="3" name="Notes Placeholder 2"/>
+          <p:cNvSpPr>
+            <a:spLocks noGrp="1"/>
+          </p:cNvSpPr>
+          <p:nvPr>
+            <p:ph type="body" idx="3" sz="quarter"/>
+          </p:nvPr>
+        </p:nvSpPr>
+        <p:spPr/>
+        <p:txBody>
+          <a:bodyPr/>
+          <a:lstStyle/>
+          <a:p>
+            <a:r>
+              <a:rPr sz="1300"/>
+              <a:t>ЛОШ КОД С ОЧЕВИДНИ КОМЕНТАРИ - Ч.2 (2 мин.)</a:t>
+            </a:r>
+          </a:p>
+          <a:p>
+            <a:r>
+              <a:rPr sz="1300"/>
+              <a:t>Продължете анализа на кода от предишния слайд.</a:t>
+            </a:r>
+          </a:p>
+          <a:p>
+            <a:r>
+              <a:rPr sz="1300"/>
+              <a:t>Подчертайте конкретен лош коментар - например: "// check if number is prime" - очевидно, вижда се от кода!</a:t>
+            </a:r>
+          </a:p>
+          <a:p>
+            <a:r>
+              <a:rPr sz="1300"/>
+              <a:t>Задайте: "Какво би трябвало да напишете вместо това?" -&gt; насочете към: нищо, или обяснение на алгоритъма.</a:t>
+            </a:r>
+          </a:p>
+          <a:p>
+            <a:r>
+              <a:rPr sz="1300"/>
+              <a:t>Завършете: "Лошите коментари са по-вредни от липсата на коментари - подвеждат!"</a:t>
+            </a:r>
+          </a:p>
+        </p:txBody>
+      </p:sp>
+      <p:sp>
+        <p:nvSpPr>
+          <p:cNvPr id="4" name="Slide Number Placeholder 3"/>
+          <p:cNvSpPr>
+            <a:spLocks noGrp="1"/>
+          </p:cNvSpPr>
+          <p:nvPr>
+            <p:ph type="sldNum" idx="5" sz="quarter"/>
+          </p:nvPr>
+        </p:nvSpPr>
+        <p:spPr/>
+      </p:sp>
+    </p:spTree>
+  </p:cSld>
+  <p:clrMapOvr>
+    <a:masterClrMapping/>
+  </p:clrMapOvr>
+</p:notes>
+</file>
+
+<file path=ppt/notesSlides/notesSlide11.xml><?xml version="1.0" encoding="utf-8"?>
+<p:notes xmlns:a="http://schemas.openxmlformats.org/drawingml/2006/main" xmlns:p="http://schemas.openxmlformats.org/presentationml/2006/main" xmlns:r="http://schemas.openxmlformats.org/officeDocument/2006/relationships">
+  <p:cSld>
+    <p:spTree>
+      <p:nvGrpSpPr>
+        <p:cNvPr id="1" name=""/>
+        <p:cNvGrpSpPr/>
+        <p:nvPr/>
+      </p:nvGrpSpPr>
+      <p:grpSpPr>
+        <a:xfrm>
+          <a:off x="0" y="0"/>
+          <a:ext cx="0" cy="0"/>
+          <a:chOff x="0" y="0"/>
+          <a:chExt cx="0" cy="0"/>
+        </a:xfrm>
+      </p:grpSpPr>
+      <p:sp>
+        <p:nvSpPr>
+          <p:cNvPr id="2" name="Slide Image Placeholder 1"/>
+          <p:cNvSpPr>
+            <a:spLocks noGrp="1"/>
+          </p:cNvSpPr>
+          <p:nvPr>
+            <p:ph type="sldImg" idx="2"/>
+          </p:nvPr>
+        </p:nvSpPr>
+        <p:spPr/>
+      </p:sp>
+      <p:sp>
+        <p:nvSpPr>
+          <p:cNvPr id="3" name="Notes Placeholder 2"/>
+          <p:cNvSpPr>
+            <a:spLocks noGrp="1"/>
+          </p:cNvSpPr>
+          <p:nvPr>
+            <p:ph type="body" idx="3" sz="quarter"/>
+          </p:nvPr>
+        </p:nvSpPr>
+        <p:spPr/>
+        <p:txBody>
+          <a:bodyPr/>
+          <a:lstStyle/>
+          <a:p>
+            <a:r>
+              <a:rPr sz="1300"/>
+              <a:t>САМООПИСАТЕЛЕН КОД - Ч.1 (3 мин.)</a:t>
+            </a:r>
+          </a:p>
+          <a:p>
+            <a:r>
+              <a:rPr sz="1300"/>
+              <a:t>Кажете: "Сега ще видим СЪЩИЯ алгоритъм, но написан по-добре."</a:t>
+            </a:r>
+          </a:p>
+          <a:p>
+            <a:r>
+              <a:rPr sz="1300"/>
+              <a:t>Покажете слайда и попитайте: "Без да четете коментарите - разбирате ли какво прави кодът?"</a:t>
+            </a:r>
+          </a:p>
+          <a:p>
+            <a:r>
+              <a:rPr sz="1300"/>
+              <a:t>Акцент: "Добрите имена са по-ценни от 10 коментара."</a:t>
+            </a:r>
+          </a:p>
+          <a:p>
+            <a:r>
+              <a:rPr sz="1300"/>
+              <a:t>Попитайте: "Кои са промените спрямо предишния пример?" - изчакайте учениците да ги открият сами.</a:t>
+            </a:r>
+          </a:p>
+        </p:txBody>
+      </p:sp>
+      <p:sp>
+        <p:nvSpPr>
+          <p:cNvPr id="4" name="Slide Number Placeholder 3"/>
+          <p:cNvSpPr>
+            <a:spLocks noGrp="1"/>
+          </p:cNvSpPr>
+          <p:nvPr>
+            <p:ph type="sldNum" idx="5" sz="quarter"/>
+          </p:nvPr>
+        </p:nvSpPr>
+        <p:spPr/>
+      </p:sp>
+    </p:spTree>
+  </p:cSld>
+  <p:clrMapOvr>
+    <a:masterClrMapping/>
+  </p:clrMapOvr>
+</p:notes>
+</file>
+
+<file path=ppt/notesSlides/notesSlide12.xml><?xml version="1.0" encoding="utf-8"?>
+<p:notes xmlns:a="http://schemas.openxmlformats.org/drawingml/2006/main" xmlns:p="http://schemas.openxmlformats.org/presentationml/2006/main" xmlns:r="http://schemas.openxmlformats.org/officeDocument/2006/relationships">
+  <p:cSld>
+    <p:spTree>
+      <p:nvGrpSpPr>
+        <p:cNvPr id="1" name=""/>
+        <p:cNvGrpSpPr/>
+        <p:nvPr/>
+      </p:nvGrpSpPr>
+      <p:grpSpPr>
+        <a:xfrm>
+          <a:off x="0" y="0"/>
+          <a:ext cx="0" cy="0"/>
+          <a:chOff x="0" y="0"/>
+          <a:chExt cx="0" cy="0"/>
+        </a:xfrm>
+      </p:grpSpPr>
+      <p:sp>
+        <p:nvSpPr>
+          <p:cNvPr id="2" name="Slide Image Placeholder 1"/>
+          <p:cNvSpPr>
+            <a:spLocks noGrp="1"/>
+          </p:cNvSpPr>
+          <p:nvPr>
+            <p:ph type="sldImg" idx="2"/>
+          </p:nvPr>
+        </p:nvSpPr>
+        <p:spPr/>
+      </p:sp>
+      <p:sp>
+        <p:nvSpPr>
+          <p:cNvPr id="3" name="Notes Placeholder 2"/>
+          <p:cNvSpPr>
+            <a:spLocks noGrp="1"/>
+          </p:cNvSpPr>
+          <p:nvPr>
+            <p:ph type="body" idx="3" sz="quarter"/>
+          </p:nvPr>
+        </p:nvSpPr>
+        <p:spPr/>
+        <p:txBody>
+          <a:bodyPr/>
+          <a:lstStyle/>
+          <a:p>
+            <a:r>
+              <a:rPr sz="1300"/>
+              <a:t>САМООПИСАТЕЛЕН КОД - Ч.2 (2 мин.)</a:t>
+            </a:r>
+          </a:p>
+          <a:p>
+            <a:r>
+              <a:rPr sz="1300"/>
+              <a:t>Прочетете ключовото твърдение на глас: "Добрият код не се нуждае от коментари. Той е самоописателен."</a:t>
+            </a:r>
+          </a:p>
+          <a:p>
+            <a:r>
+              <a:rPr sz="1300"/>
+              <a:t>Предизвикайте дискусия: "Съгласни ли сте? Кога ВСЕ ПАК трябват коментари?"</a:t>
+            </a:r>
+          </a:p>
+          <a:p>
+            <a:r>
+              <a:rPr sz="1300"/>
+              <a:t>Очаквани отговори: сложни алгоритми, нестандартни решения, workaround-и.</a:t>
+            </a:r>
+          </a:p>
+          <a:p>
+            <a:r>
+              <a:rPr sz="1300"/>
+              <a:t>Кажете: "Коментарите трябват за ЗАЩО, не за КАК."</a:t>
+            </a:r>
+          </a:p>
+        </p:txBody>
+      </p:sp>
+      <p:sp>
+        <p:nvSpPr>
+          <p:cNvPr id="4" name="Slide Number Placeholder 3"/>
+          <p:cNvSpPr>
+            <a:spLocks noGrp="1"/>
+          </p:cNvSpPr>
+          <p:nvPr>
+            <p:ph type="sldNum" idx="5" sz="quarter"/>
+          </p:nvPr>
+        </p:nvSpPr>
+        <p:spPr/>
+      </p:sp>
+    </p:spTree>
+  </p:cSld>
+  <p:clrMapOvr>
+    <a:masterClrMapping/>
+  </p:clrMapOvr>
+</p:notes>
+</file>
+
+<file path=ppt/notesSlides/notesSlide13.xml><?xml version="1.0" encoding="utf-8"?>
+<p:notes xmlns:a="http://schemas.openxmlformats.org/drawingml/2006/main" xmlns:p="http://schemas.openxmlformats.org/presentationml/2006/main" xmlns:r="http://schemas.openxmlformats.org/officeDocument/2006/relationships">
+  <p:cSld>
+    <p:spTree>
+      <p:nvGrpSpPr>
+        <p:cNvPr id="1" name=""/>
+        <p:cNvGrpSpPr/>
+        <p:nvPr/>
+      </p:nvGrpSpPr>
+      <p:grpSpPr>
+        <a:xfrm>
+          <a:off x="0" y="0"/>
+          <a:ext cx="0" cy="0"/>
+          <a:chOff x="0" y="0"/>
+          <a:chExt cx="0" cy="0"/>
+        </a:xfrm>
+      </p:grpSpPr>
+      <p:sp>
+        <p:nvSpPr>
+          <p:cNvPr id="2" name="Slide Image Placeholder 1"/>
+          <p:cNvSpPr>
+            <a:spLocks noGrp="1"/>
+          </p:cNvSpPr>
+          <p:nvPr>
+            <p:ph type="sldImg" idx="2"/>
+          </p:nvPr>
+        </p:nvSpPr>
+        <p:spPr/>
+      </p:sp>
+      <p:sp>
+        <p:nvSpPr>
+          <p:cNvPr id="3" name="Notes Placeholder 2"/>
+          <p:cNvSpPr>
+            <a:spLocks noGrp="1"/>
+          </p:cNvSpPr>
+          <p:nvPr>
+            <p:ph type="body" idx="3" sz="quarter"/>
+          </p:nvPr>
+        </p:nvSpPr>
+        <p:spPr/>
+        <p:txBody>
+          <a:bodyPr/>
+          <a:lstStyle/>
+          <a:p>
+            <a:r>
+              <a:rPr sz="1300"/>
+              <a:t>ПРИМЕР ЗА ЛОШ СТИЛ (2 мин.)</a:t>
+            </a:r>
+          </a:p>
+          <a:p>
+            <a:r>
+              <a:rPr sz="1300"/>
+              <a:t>Покажете слайда и попитайте: "Само от имената - можете ли да разберете какво прави методът?"</a:t>
+            </a:r>
+          </a:p>
+          <a:p>
+            <a:r>
+              <a:rPr sz="1300"/>
+              <a:t>Посочете конкретно: 'i', 'j', 'meetsCriteria' - неинформативни.</a:t>
+            </a:r>
+          </a:p>
+          <a:p>
+            <a:r>
+              <a:rPr sz="1300"/>
+              <a:t>Въпрос: "Ако сте го написали преди 6 месеца, бихте ли го разбрали сега?"</a:t>
+            </a:r>
+          </a:p>
+          <a:p>
+            <a:r>
+              <a:rPr sz="1300"/>
+              <a:t>НЕ разкривайте отговора - преминете към следващия слайд за сравнение.</a:t>
+            </a:r>
+          </a:p>
+        </p:txBody>
+      </p:sp>
+      <p:sp>
+        <p:nvSpPr>
+          <p:cNvPr id="4" name="Slide Number Placeholder 3"/>
+          <p:cNvSpPr>
+            <a:spLocks noGrp="1"/>
+          </p:cNvSpPr>
+          <p:nvPr>
+            <p:ph type="sldNum" idx="5" sz="quarter"/>
+          </p:nvPr>
+        </p:nvSpPr>
+        <p:spPr/>
+      </p:sp>
+    </p:spTree>
+  </p:cSld>
+  <p:clrMapOvr>
+    <a:masterClrMapping/>
+  </p:clrMapOvr>
+</p:notes>
+</file>
+
+<file path=ppt/notesSlides/notesSlide14.xml><?xml version="1.0" encoding="utf-8"?>
+<p:notes xmlns:a="http://schemas.openxmlformats.org/drawingml/2006/main" xmlns:p="http://schemas.openxmlformats.org/presentationml/2006/main" xmlns:r="http://schemas.openxmlformats.org/officeDocument/2006/relationships">
+  <p:cSld>
+    <p:spTree>
+      <p:nvGrpSpPr>
+        <p:cNvPr id="1" name=""/>
+        <p:cNvGrpSpPr/>
+        <p:nvPr/>
+      </p:nvGrpSpPr>
+      <p:grpSpPr>
+        <a:xfrm>
+          <a:off x="0" y="0"/>
+          <a:ext cx="0" cy="0"/>
+          <a:chOff x="0" y="0"/>
+          <a:chExt cx="0" cy="0"/>
+        </a:xfrm>
+      </p:grpSpPr>
+      <p:sp>
+        <p:nvSpPr>
+          <p:cNvPr id="2" name="Slide Image Placeholder 1"/>
+          <p:cNvSpPr>
+            <a:spLocks noGrp="1"/>
+          </p:cNvSpPr>
+          <p:nvPr>
+            <p:ph type="sldImg" idx="2"/>
+          </p:nvPr>
+        </p:nvSpPr>
+        <p:spPr/>
+      </p:sp>
+      <p:sp>
+        <p:nvSpPr>
+          <p:cNvPr id="3" name="Notes Placeholder 2"/>
+          <p:cNvSpPr>
+            <a:spLocks noGrp="1"/>
+          </p:cNvSpPr>
+          <p:nvPr>
+            <p:ph type="body" idx="3" sz="quarter"/>
+          </p:nvPr>
+        </p:nvSpPr>
+        <p:spPr/>
+        <p:txBody>
+          <a:bodyPr/>
+          <a:lstStyle/>
+          <a:p>
+            <a:r>
+              <a:rPr sz="1300"/>
+              <a:t>ПРИМЕР ЗА ДОБЪР СТИЛ (2 мин.)</a:t>
+            </a:r>
+          </a:p>
+          <a:p>
+            <a:r>
+              <a:rPr sz="1300"/>
+              <a:t>Поставете слайд 9 и 10 един до друг - превключвайте между тях.</a:t>
+            </a:r>
+          </a:p>
+          <a:p>
+            <a:r>
+              <a:rPr sz="1300"/>
+              <a:t>Попитайте: "Кои са разликите?"</a:t>
+            </a:r>
+          </a:p>
+          <a:p>
+            <a:r>
+              <a:rPr sz="1300"/>
+              <a:t>Изброете заедно: 'primeCandidate', 'factor', 'factorableNumber' - самоописателни имена.</a:t>
+            </a:r>
+          </a:p>
+          <a:p>
+            <a:r>
+              <a:rPr sz="1300"/>
+              <a:t>Акцент: "Без нито един коментар - кодът се разбира веднага."</a:t>
+            </a:r>
+          </a:p>
+        </p:txBody>
+      </p:sp>
+      <p:sp>
+        <p:nvSpPr>
+          <p:cNvPr id="4" name="Slide Number Placeholder 3"/>
+          <p:cNvSpPr>
+            <a:spLocks noGrp="1"/>
+          </p:cNvSpPr>
+          <p:nvPr>
+            <p:ph type="sldNum" idx="5" sz="quarter"/>
+          </p:nvPr>
+        </p:nvSpPr>
+        <p:spPr/>
+      </p:sp>
+    </p:spTree>
+  </p:cSld>
+  <p:clrMapOvr>
+    <a:masterClrMapping/>
+  </p:clrMapOvr>
+</p:notes>
+</file>
+
+<file path=ppt/notesSlides/notesSlide15.xml><?xml version="1.0" encoding="utf-8"?>
+<p:notes xmlns:a="http://schemas.openxmlformats.org/drawingml/2006/main" xmlns:p="http://schemas.openxmlformats.org/presentationml/2006/main" xmlns:r="http://schemas.openxmlformats.org/officeDocument/2006/relationships">
+  <p:cSld>
+    <p:spTree>
+      <p:nvGrpSpPr>
+        <p:cNvPr id="1" name=""/>
+        <p:cNvGrpSpPr/>
+        <p:nvPr/>
+      </p:nvGrpSpPr>
+      <p:grpSpPr>
+        <a:xfrm>
+          <a:off x="0" y="0"/>
+          <a:ext cx="0" cy="0"/>
+          <a:chOff x="0" y="0"/>
+          <a:chExt cx="0" cy="0"/>
+        </a:xfrm>
+      </p:grpSpPr>
+      <p:sp>
+        <p:nvSpPr>
+          <p:cNvPr id="2" name="Slide Image Placeholder 1"/>
+          <p:cNvSpPr>
+            <a:spLocks noGrp="1"/>
+          </p:cNvSpPr>
+          <p:nvPr>
+            <p:ph type="sldImg" idx="2"/>
+          </p:nvPr>
+        </p:nvSpPr>
+        <p:spPr/>
+      </p:sp>
+      <p:sp>
+        <p:nvSpPr>
+          <p:cNvPr id="3" name="Notes Placeholder 2"/>
+          <p:cNvSpPr>
+            <a:spLocks noGrp="1"/>
+          </p:cNvSpPr>
+          <p:nvPr>
+            <p:ph type="body" idx="3" sz="quarter"/>
+          </p:nvPr>
+        </p:nvSpPr>
+        <p:spPr/>
+        <p:txBody>
+          <a:bodyPr/>
+          <a:lstStyle/>
+          <a:p>
+            <a:r>
+              <a:rPr sz="1300"/>
+              <a:t>ОСНОВНИ ПРИНЦИПИ НА САМООПИСАТЕЛНИЯ КОД (3 мин.)</a:t>
+            </a:r>
+          </a:p>
+          <a:p>
+            <a:r>
+              <a:rPr sz="1300"/>
+              <a:t>Прочетете двете ключови цитата с пауза след всеки:</a:t>
+            </a:r>
+          </a:p>
+          <a:p>
+            <a:r>
+              <a:rPr sz="1300"/>
+              <a:t>  "Най-добрата документация е самият код." - пауза - "Съгласни ли сте?"</a:t>
+            </a:r>
+          </a:p>
+          <a:p>
+            <a:r>
+              <a:rPr sz="1300"/>
+              <a:t>  "Не документирайте лош код, пренапишете го!" - пауза - "Кога сте срещали лош код с много коментари?"</a:t>
+            </a:r>
+          </a:p>
+          <a:p>
+            <a:r>
+              <a:rPr sz="1300"/>
+              <a:t>Обяснете: "Принципът не е да НЕ пишете коментари, а да напишете кода така, че коментарите да обясняват ЗАЩО, не КАК."</a:t>
+            </a:r>
+          </a:p>
+        </p:txBody>
+      </p:sp>
+      <p:sp>
+        <p:nvSpPr>
+          <p:cNvPr id="4" name="Slide Number Placeholder 3"/>
+          <p:cNvSpPr>
+            <a:spLocks noGrp="1"/>
+          </p:cNvSpPr>
+          <p:nvPr>
+            <p:ph type="sldNum" idx="5" sz="quarter"/>
+          </p:nvPr>
+        </p:nvSpPr>
+        <p:spPr/>
+      </p:sp>
+    </p:spTree>
+  </p:cSld>
+  <p:clrMapOvr>
+    <a:masterClrMapping/>
+  </p:clrMapOvr>
+</p:notes>
+</file>
+
+<file path=ppt/notesSlides/notesSlide16.xml><?xml version="1.0" encoding="utf-8"?>
+<p:notes xmlns:a="http://schemas.openxmlformats.org/drawingml/2006/main" xmlns:p="http://schemas.openxmlformats.org/presentationml/2006/main" xmlns:r="http://schemas.openxmlformats.org/officeDocument/2006/relationships">
+  <p:cSld>
+    <p:spTree>
+      <p:nvGrpSpPr>
+        <p:cNvPr id="1" name=""/>
+        <p:cNvGrpSpPr/>
+        <p:nvPr/>
+      </p:nvGrpSpPr>
+      <p:grpSpPr>
+        <a:xfrm>
+          <a:off x="0" y="0"/>
+          <a:ext cx="0" cy="0"/>
+          <a:chOff x="0" y="0"/>
+          <a:chExt cx="0" cy="0"/>
+        </a:xfrm>
+      </p:grpSpPr>
+      <p:sp>
+        <p:nvSpPr>
+          <p:cNvPr id="2" name="Slide Image Placeholder 1"/>
+          <p:cNvSpPr>
+            <a:spLocks noGrp="1"/>
+          </p:cNvSpPr>
+          <p:nvPr>
+            <p:ph type="sldImg" idx="2"/>
+          </p:nvPr>
+        </p:nvSpPr>
+        <p:spPr/>
+      </p:sp>
+      <p:sp>
+        <p:nvSpPr>
+          <p:cNvPr id="3" name="Notes Placeholder 2"/>
+          <p:cNvSpPr>
+            <a:spLocks noGrp="1"/>
+          </p:cNvSpPr>
+          <p:nvPr>
+            <p:ph type="body" idx="3" sz="quarter"/>
+          </p:nvPr>
+        </p:nvSpPr>
+        <p:spPr/>
+        <p:txBody>
+          <a:bodyPr/>
+          <a:lstStyle/>
+          <a:p>
+            <a:r>
+              <a:rPr sz="1300"/>
+              <a:t>КОНТРОЛЕН СПИСЪК - КЛАСОВЕ (3 мин.)</a:t>
+            </a:r>
+          </a:p>
+          <a:p>
+            <a:r>
+              <a:rPr sz="1300"/>
+              <a:t>Не четете всяка точка - задайте ги като въпроси:</a:t>
+            </a:r>
+          </a:p>
+          <a:p>
+            <a:r>
+              <a:rPr sz="1300"/>
+              <a:t>  "Как проверявате дали интерфейсът на класа е завършена абстракция?"</a:t>
+            </a:r>
+          </a:p>
+          <a:p>
+            <a:r>
+              <a:rPr sz="1300"/>
+              <a:t>  "Може ли да третирате класа като черна кутия - важно е или не?"</a:t>
+            </a:r>
+          </a:p>
+          <a:p>
+            <a:r>
+              <a:rPr sz="1300"/>
+              <a:t>Дайте пример: "Клас DatabaseHelper с метод Connect() - интуитивен ли е?"</a:t>
+            </a:r>
+          </a:p>
+          <a:p>
+            <a:r>
+              <a:rPr sz="1300"/>
+              <a:t>Кажете: "Тази листа ще ви помага при code review."</a:t>
+            </a:r>
+          </a:p>
+        </p:txBody>
+      </p:sp>
+      <p:sp>
+        <p:nvSpPr>
+          <p:cNvPr id="4" name="Slide Number Placeholder 3"/>
+          <p:cNvSpPr>
+            <a:spLocks noGrp="1"/>
+          </p:cNvSpPr>
+          <p:nvPr>
+            <p:ph type="sldNum" idx="5" sz="quarter"/>
+          </p:nvPr>
+        </p:nvSpPr>
+        <p:spPr/>
+      </p:sp>
+    </p:spTree>
+  </p:cSld>
+  <p:clrMapOvr>
+    <a:masterClrMapping/>
+  </p:clrMapOvr>
+</p:notes>
+</file>
+
+<file path=ppt/notesSlides/notesSlide17.xml><?xml version="1.0" encoding="utf-8"?>
+<p:notes xmlns:a="http://schemas.openxmlformats.org/drawingml/2006/main" xmlns:p="http://schemas.openxmlformats.org/presentationml/2006/main" xmlns:r="http://schemas.openxmlformats.org/officeDocument/2006/relationships">
+  <p:cSld>
+    <p:spTree>
+      <p:nvGrpSpPr>
+        <p:cNvPr id="1" name=""/>
+        <p:cNvGrpSpPr/>
+        <p:nvPr/>
+      </p:nvGrpSpPr>
+      <p:grpSpPr>
+        <a:xfrm>
+          <a:off x="0" y="0"/>
+          <a:ext cx="0" cy="0"/>
+          <a:chOff x="0" y="0"/>
+          <a:chExt cx="0" cy="0"/>
+        </a:xfrm>
+      </p:grpSpPr>
+      <p:sp>
+        <p:nvSpPr>
+          <p:cNvPr id="2" name="Slide Image Placeholder 1"/>
+          <p:cNvSpPr>
+            <a:spLocks noGrp="1"/>
+          </p:cNvSpPr>
+          <p:nvPr>
+            <p:ph type="sldImg" idx="2"/>
+          </p:nvPr>
+        </p:nvSpPr>
+        <p:spPr/>
+      </p:sp>
+      <p:sp>
+        <p:nvSpPr>
+          <p:cNvPr id="3" name="Notes Placeholder 2"/>
+          <p:cNvSpPr>
+            <a:spLocks noGrp="1"/>
+          </p:cNvSpPr>
+          <p:nvPr>
+            <p:ph type="body" idx="3" sz="quarter"/>
+          </p:nvPr>
+        </p:nvSpPr>
+        <p:spPr/>
+        <p:txBody>
+          <a:bodyPr/>
+          <a:lstStyle/>
+          <a:p>
+            <a:r>
+              <a:rPr sz="1300"/>
+              <a:t>КОНТРОЛЕН СПИСЪК - МЕТОДИ И ИМЕНА (2 мин.)</a:t>
+            </a:r>
+          </a:p>
+          <a:p>
+            <a:r>
+              <a:rPr sz="1300"/>
+              <a:t>Акцент: "Извършва ли всеки метод ЕДНА-ЕДИНСТВЕНА добре дефинирана задача?"</a:t>
+            </a:r>
+          </a:p>
+          <a:p>
+            <a:r>
+              <a:rPr sz="1300"/>
+              <a:t>Контрапример: метод LoadDataAndSaveToDbAndSendEmail() - какъв е проблемът?</a:t>
+            </a:r>
+          </a:p>
+          <a:p>
+            <a:r>
+              <a:rPr sz="1300"/>
+              <a:t>Обяснете: "Single Responsibility Principle - ще го срещнете в ООП."</a:t>
+            </a:r>
+          </a:p>
+          <a:p>
+            <a:r>
+              <a:rPr sz="1300"/>
+              <a:t>Въпрос: "Кога последно сте виждали метод, чието име НЕ описва какво прави?"</a:t>
+            </a:r>
+          </a:p>
+        </p:txBody>
+      </p:sp>
+      <p:sp>
+        <p:nvSpPr>
+          <p:cNvPr id="4" name="Slide Number Placeholder 3"/>
+          <p:cNvSpPr>
+            <a:spLocks noGrp="1"/>
+          </p:cNvSpPr>
+          <p:nvPr>
+            <p:ph type="sldNum" idx="5" sz="quarter"/>
+          </p:nvPr>
+        </p:nvSpPr>
+        <p:spPr/>
+      </p:sp>
+    </p:spTree>
+  </p:cSld>
+  <p:clrMapOvr>
+    <a:masterClrMapping/>
+  </p:clrMapOvr>
+</p:notes>
+</file>
+
+<file path=ppt/notesSlides/notesSlide18.xml><?xml version="1.0" encoding="utf-8"?>
+<p:notes xmlns:a="http://schemas.openxmlformats.org/drawingml/2006/main" xmlns:p="http://schemas.openxmlformats.org/presentationml/2006/main" xmlns:r="http://schemas.openxmlformats.org/officeDocument/2006/relationships">
+  <p:cSld>
+    <p:spTree>
+      <p:nvGrpSpPr>
+        <p:cNvPr id="1" name=""/>
+        <p:cNvGrpSpPr/>
+        <p:nvPr/>
+      </p:nvGrpSpPr>
+      <p:grpSpPr>
+        <a:xfrm>
+          <a:off x="0" y="0"/>
+          <a:ext cx="0" cy="0"/>
+          <a:chOff x="0" y="0"/>
+          <a:chExt cx="0" cy="0"/>
+        </a:xfrm>
+      </p:grpSpPr>
+      <p:sp>
+        <p:nvSpPr>
+          <p:cNvPr id="2" name="Slide Image Placeholder 1"/>
+          <p:cNvSpPr>
+            <a:spLocks noGrp="1"/>
+          </p:cNvSpPr>
+          <p:nvPr>
+            <p:ph type="sldImg" idx="2"/>
+          </p:nvPr>
+        </p:nvSpPr>
+        <p:spPr/>
+      </p:sp>
+      <p:sp>
+        <p:nvSpPr>
+          <p:cNvPr id="3" name="Notes Placeholder 2"/>
+          <p:cNvSpPr>
+            <a:spLocks noGrp="1"/>
+          </p:cNvSpPr>
+          <p:nvPr>
+            <p:ph type="body" idx="3" sz="quarter"/>
+          </p:nvPr>
+        </p:nvSpPr>
+        <p:spPr/>
+        <p:txBody>
+          <a:bodyPr/>
+          <a:lstStyle/>
+          <a:p>
+            <a:r>
+              <a:rPr sz="1300"/>
+              <a:t>КОНТРОЛЕН СПИСЪК - ИМЕНА И СТРУКТУРА (2 мин.)</a:t>
+            </a:r>
+          </a:p>
+          <a:p>
+            <a:r>
+              <a:rPr sz="1300"/>
+              <a:t>Бърз преглед - не задавайте въпроси, просто коментирайте:</a:t>
+            </a:r>
+          </a:p>
+          <a:p>
+            <a:r>
+              <a:rPr sz="1300"/>
+              <a:t>  "Конвенции: C# - PascalCase за класове, camelCase за локални."</a:t>
+            </a:r>
+          </a:p>
+          <a:p>
+            <a:r>
+              <a:rPr sz="1300"/>
+              <a:t>  "Ако трябва речник за обяснение на типа - нещо не е наред."</a:t>
+            </a:r>
+          </a:p>
+          <a:p>
+            <a:r>
+              <a:rPr sz="1300"/>
+              <a:t>Завършете: "Запомнете тази листа - ще ви е нужна при преработка на код."</a:t>
+            </a:r>
+          </a:p>
+        </p:txBody>
+      </p:sp>
+      <p:sp>
+        <p:nvSpPr>
+          <p:cNvPr id="4" name="Slide Number Placeholder 3"/>
+          <p:cNvSpPr>
+            <a:spLocks noGrp="1"/>
+          </p:cNvSpPr>
+          <p:nvPr>
+            <p:ph type="sldNum" idx="5" sz="quarter"/>
+          </p:nvPr>
+        </p:nvSpPr>
+        <p:spPr/>
+      </p:sp>
+    </p:spTree>
+  </p:cSld>
+  <p:clrMapOvr>
+    <a:masterClrMapping/>
+  </p:clrMapOvr>
+</p:notes>
+</file>
+
+<file path=ppt/notesSlides/notesSlide19.xml><?xml version="1.0" encoding="utf-8"?>
+<p:notes xmlns:a="http://schemas.openxmlformats.org/drawingml/2006/main" xmlns:p="http://schemas.openxmlformats.org/presentationml/2006/main" xmlns:r="http://schemas.openxmlformats.org/officeDocument/2006/relationships">
+  <p:cSld>
+    <p:spTree>
+      <p:nvGrpSpPr>
+        <p:cNvPr id="1" name=""/>
+        <p:cNvGrpSpPr/>
+        <p:nvPr/>
+      </p:nvGrpSpPr>
+      <p:grpSpPr>
+        <a:xfrm>
+          <a:off x="0" y="0"/>
+          <a:ext cx="0" cy="0"/>
+          <a:chOff x="0" y="0"/>
+          <a:chExt cx="0" cy="0"/>
+        </a:xfrm>
+      </p:grpSpPr>
+      <p:sp>
+        <p:nvSpPr>
+          <p:cNvPr id="2" name="Slide Image Placeholder 1"/>
+          <p:cNvSpPr>
+            <a:spLocks noGrp="1"/>
+          </p:cNvSpPr>
+          <p:nvPr>
+            <p:ph type="sldImg" idx="2"/>
+          </p:nvPr>
+        </p:nvSpPr>
+        <p:spPr/>
+      </p:sp>
+      <p:sp>
+        <p:nvSpPr>
+          <p:cNvPr id="3" name="Notes Placeholder 2"/>
+          <p:cNvSpPr>
+            <a:spLocks noGrp="1"/>
+          </p:cNvSpPr>
+          <p:nvPr>
+            <p:ph type="body" idx="3" sz="quarter"/>
+          </p:nvPr>
+        </p:nvSpPr>
+        <p:spPr/>
+        <p:txBody>
+          <a:bodyPr/>
+          <a:lstStyle/>
+          <a:p>
+            <a:r>
+              <a:rPr sz="1300"/>
+              <a:t>ЕФЕКТИВНИ КОМЕНТАРИ - ВЪВЕДЕНИЕ (2 мин.)</a:t>
+            </a:r>
+          </a:p>
+          <a:p>
+            <a:r>
+              <a:rPr sz="1300"/>
+              <a:t>Прочетете определението: "Ефективните коментари не повтарят кода. Обясняват го на по-високо ниво."</a:t>
+            </a:r>
+          </a:p>
+          <a:p>
+            <a:r>
+              <a:rPr sz="1300"/>
+              <a:t>Дайте аналогия: "Картата не е самото място - коментарът не е самият код."</a:t>
+            </a:r>
+          </a:p>
+          <a:p>
+            <a:r>
+              <a:rPr sz="1300"/>
+              <a:t>Задайте: "Можете ли да дадете пример за коментар на 'по-високо ниво'?"</a:t>
+            </a:r>
+          </a:p>
+          <a:p>
+            <a:r>
+              <a:rPr sz="1300"/>
+              <a:t>Очакван отговор: описание на алгоритъм, бизнес логика, защо е избран даден подход.</a:t>
+            </a:r>
+          </a:p>
+        </p:txBody>
+      </p:sp>
+      <p:sp>
+        <p:nvSpPr>
+          <p:cNvPr id="4" name="Slide Number Placeholder 3"/>
+          <p:cNvSpPr>
+            <a:spLocks noGrp="1"/>
+          </p:cNvSpPr>
+          <p:nvPr>
+            <p:ph type="sldNum" idx="5" sz="quarter"/>
+          </p:nvPr>
+        </p:nvSpPr>
+        <p:spPr/>
+      </p:sp>
+    </p:spTree>
   </p:cSld>
   <p:clrMapOvr>
     <a:masterClrMapping/>
@@ -2279,7 +3257,41 @@
           </a:bodyPr>
           <a:lstStyle/>
           <a:p>
+            <a:r>
+              <a:rPr sz="1300"/>
+              <a:t>СТИЛ НА ПРОГРАМИРАНЕ КАТО ДОКУМЕНТАЦИЯ (3 мин.)</a:t>
+            </a:r>
             <a:endParaRPr lang="en-US" dirty="0"/>
+          </a:p>
+          <a:p>
+            <a:r>
+              <a:rPr sz="1300"/>
+              <a:t>Кажете: "Преди да напишем и един коментар, трябва да имаме добър стил."</a:t>
+            </a:r>
+          </a:p>
+          <a:p>
+            <a:r>
+              <a:rPr sz="1300"/>
+              <a:t>Минете точките като въпроси:</a:t>
+            </a:r>
+          </a:p>
+          <a:p>
+            <a:r>
+              <a:rPr sz="1300"/>
+              <a:t>  "Каква е разликата между 'a' и 'studentAge' като имена?"</a:t>
+            </a:r>
+          </a:p>
+          <a:p>
+            <a:r>
+              <a:rPr sz="1300"/>
+              <a:t>  "Защо 'възможно най-малка сложност' помага за разбирането?"</a:t>
+            </a:r>
+          </a:p>
+          <a:p>
+            <a:r>
+              <a:rPr sz="1300"/>
+              <a:t>Акцент: "Стилът е ПЪРВАТА линия на документация. Коментарите са втората."</a:t>
+            </a:r>
           </a:p>
         </p:txBody>
       </p:sp>
@@ -2388,6 +3400,1016 @@
         <p14:creationId xmlns:p14="http://schemas.microsoft.com/office/powerpoint/2010/main" val="142899990"/>
       </p:ext>
     </p:extLst>
+  </p:cSld>
+  <p:clrMapOvr>
+    <a:masterClrMapping/>
+  </p:clrMapOvr>
+</p:notes>
+</file>
+
+<file path=ppt/notesSlides/notesSlide20.xml><?xml version="1.0" encoding="utf-8"?>
+<p:notes xmlns:a="http://schemas.openxmlformats.org/drawingml/2006/main" xmlns:p="http://schemas.openxmlformats.org/presentationml/2006/main" xmlns:r="http://schemas.openxmlformats.org/officeDocument/2006/relationships">
+  <p:cSld>
+    <p:spTree>
+      <p:nvGrpSpPr>
+        <p:cNvPr id="1" name=""/>
+        <p:cNvGrpSpPr/>
+        <p:nvPr/>
+      </p:nvGrpSpPr>
+      <p:grpSpPr>
+        <a:xfrm>
+          <a:off x="0" y="0"/>
+          <a:ext cx="0" cy="0"/>
+          <a:chOff x="0" y="0"/>
+          <a:chExt cx="0" cy="0"/>
+        </a:xfrm>
+      </p:grpSpPr>
+      <p:sp>
+        <p:nvSpPr>
+          <p:cNvPr id="2" name="Slide Image Placeholder 1"/>
+          <p:cNvSpPr>
+            <a:spLocks noGrp="1"/>
+          </p:cNvSpPr>
+          <p:nvPr>
+            <p:ph type="sldImg" idx="2"/>
+          </p:nvPr>
+        </p:nvSpPr>
+        <p:spPr/>
+      </p:sp>
+      <p:sp>
+        <p:nvSpPr>
+          <p:cNvPr id="3" name="Notes Placeholder 2"/>
+          <p:cNvSpPr>
+            <a:spLocks noGrp="1"/>
+          </p:cNvSpPr>
+          <p:nvPr>
+            <p:ph type="body" idx="3" sz="quarter"/>
+          </p:nvPr>
+        </p:nvSpPr>
+        <p:spPr/>
+        <p:txBody>
+          <a:bodyPr/>
+          <a:lstStyle/>
+          <a:p>
+            <a:r>
+              <a:rPr sz="1300"/>
+              <a:t>ПОДВЕЖДАЩИ КОМЕНТАРИ (3 мин.)</a:t>
+            </a:r>
+          </a:p>
+          <a:p>
+            <a:r>
+              <a:rPr sz="1300"/>
+              <a:t>Покажете примера с коментара, описващ грешно какво изчислява кодът.</a:t>
+            </a:r>
+          </a:p>
+          <a:p>
+            <a:r>
+              <a:rPr sz="1300"/>
+              <a:t>Задайте въпроса от слайда: "Можете ли да познаете коя сума е равна на i-тото число на Фибоначи?"</a:t>
+            </a:r>
+          </a:p>
+          <a:p>
+            <a:r>
+              <a:rPr sz="1300"/>
+              <a:t>Изчакайте отговори - ако никой не може: "Точно! Подвеждащият коментар е по-лош от никакъв."</a:t>
+            </a:r>
+          </a:p>
+          <a:p>
+            <a:r>
+              <a:rPr sz="1300"/>
+              <a:t>Акцент: "Коментар, който лъже, е програмна ГРЕШКА - може да изведе разработчика в грешна посока."</a:t>
+            </a:r>
+          </a:p>
+        </p:txBody>
+      </p:sp>
+      <p:sp>
+        <p:nvSpPr>
+          <p:cNvPr id="4" name="Slide Number Placeholder 3"/>
+          <p:cNvSpPr>
+            <a:spLocks noGrp="1"/>
+          </p:cNvSpPr>
+          <p:nvPr>
+            <p:ph type="sldNum" idx="5" sz="quarter"/>
+          </p:nvPr>
+        </p:nvSpPr>
+        <p:spPr/>
+      </p:sp>
+    </p:spTree>
+  </p:cSld>
+  <p:clrMapOvr>
+    <a:masterClrMapping/>
+  </p:clrMapOvr>
+</p:notes>
+</file>
+
+<file path=ppt/notesSlides/notesSlide21.xml><?xml version="1.0" encoding="utf-8"?>
+<p:notes xmlns:a="http://schemas.openxmlformats.org/drawingml/2006/main" xmlns:p="http://schemas.openxmlformats.org/presentationml/2006/main" xmlns:r="http://schemas.openxmlformats.org/officeDocument/2006/relationships">
+  <p:cSld>
+    <p:spTree>
+      <p:nvGrpSpPr>
+        <p:cNvPr id="1" name=""/>
+        <p:cNvGrpSpPr/>
+        <p:nvPr/>
+      </p:nvGrpSpPr>
+      <p:grpSpPr>
+        <a:xfrm>
+          <a:off x="0" y="0"/>
+          <a:ext cx="0" cy="0"/>
+          <a:chOff x="0" y="0"/>
+          <a:chExt cx="0" cy="0"/>
+        </a:xfrm>
+      </p:grpSpPr>
+      <p:sp>
+        <p:nvSpPr>
+          <p:cNvPr id="2" name="Slide Image Placeholder 1"/>
+          <p:cNvSpPr>
+            <a:spLocks noGrp="1"/>
+          </p:cNvSpPr>
+          <p:nvPr>
+            <p:ph type="sldImg" idx="2"/>
+          </p:nvPr>
+        </p:nvSpPr>
+        <p:spPr/>
+      </p:sp>
+      <p:sp>
+        <p:nvSpPr>
+          <p:cNvPr id="3" name="Notes Placeholder 2"/>
+          <p:cNvSpPr>
+            <a:spLocks noGrp="1"/>
+          </p:cNvSpPr>
+          <p:nvPr>
+            <p:ph type="body" idx="3" sz="quarter"/>
+          </p:nvPr>
+        </p:nvSpPr>
+        <p:spPr/>
+        <p:txBody>
+          <a:bodyPr/>
+          <a:lstStyle/>
+          <a:p>
+            <a:r>
+              <a:rPr sz="1300"/>
+              <a:t>КЛЮЧОВ АСПЕКТ 1 - СТИЛ, УДОБЕН ЗА ПРОМЕНИ (3 мин.)</a:t>
+            </a:r>
+          </a:p>
+          <a:p>
+            <a:r>
+              <a:rPr sz="1300"/>
+              <a:t>Покажете примера с таблица от коментари в стар стил.</a:t>
+            </a:r>
+          </a:p>
+          <a:p>
+            <a:r>
+              <a:rPr sz="1300"/>
+              <a:t>Задайте: "Какво се случва с тази таблица, ако добавим нова променлива?"</a:t>
+            </a:r>
+          </a:p>
+          <a:p>
+            <a:r>
+              <a:rPr sz="1300"/>
+              <a:t>Отговор: трябва да преформатираме ВСИЧКО - много работа за нищо.</a:t>
+            </a:r>
+          </a:p>
+          <a:p>
+            <a:r>
+              <a:rPr sz="1300"/>
+              <a:t>Препоръка: "Използвайте прост inline коментар: int factor; // current divisor"</a:t>
+            </a:r>
+          </a:p>
+          <a:p>
+            <a:r>
+              <a:rPr sz="1300"/>
+              <a:t>Акцент: "Коментарите трябва да се поддържат лесно - иначе бързо остаряват."</a:t>
+            </a:r>
+          </a:p>
+        </p:txBody>
+      </p:sp>
+      <p:sp>
+        <p:nvSpPr>
+          <p:cNvPr id="4" name="Slide Number Placeholder 3"/>
+          <p:cNvSpPr>
+            <a:spLocks noGrp="1"/>
+          </p:cNvSpPr>
+          <p:nvPr>
+            <p:ph type="sldNum" idx="5" sz="quarter"/>
+          </p:nvPr>
+        </p:nvSpPr>
+        <p:spPr/>
+      </p:sp>
+    </p:spTree>
+  </p:cSld>
+  <p:clrMapOvr>
+    <a:masterClrMapping/>
+  </p:clrMapOvr>
+</p:notes>
+</file>
+
+<file path=ppt/notesSlides/notesSlide22.xml><?xml version="1.0" encoding="utf-8"?>
+<p:notes xmlns:a="http://schemas.openxmlformats.org/drawingml/2006/main" xmlns:p="http://schemas.openxmlformats.org/presentationml/2006/main" xmlns:r="http://schemas.openxmlformats.org/officeDocument/2006/relationships">
+  <p:cSld>
+    <p:spTree>
+      <p:nvGrpSpPr>
+        <p:cNvPr id="1" name=""/>
+        <p:cNvGrpSpPr/>
+        <p:nvPr/>
+      </p:nvGrpSpPr>
+      <p:grpSpPr>
+        <a:xfrm>
+          <a:off x="0" y="0"/>
+          <a:ext cx="0" cy="0"/>
+          <a:chOff x="0" y="0"/>
+          <a:chExt cx="0" cy="0"/>
+        </a:xfrm>
+      </p:grpSpPr>
+      <p:sp>
+        <p:nvSpPr>
+          <p:cNvPr id="2" name="Slide Image Placeholder 1"/>
+          <p:cNvSpPr>
+            <a:spLocks noGrp="1"/>
+          </p:cNvSpPr>
+          <p:nvPr>
+            <p:ph type="sldImg" idx="2"/>
+          </p:nvPr>
+        </p:nvSpPr>
+        <p:spPr/>
+      </p:sp>
+      <p:sp>
+        <p:nvSpPr>
+          <p:cNvPr id="3" name="Notes Placeholder 2"/>
+          <p:cNvSpPr>
+            <a:spLocks noGrp="1"/>
+          </p:cNvSpPr>
+          <p:nvPr>
+            <p:ph type="body" idx="3" sz="quarter"/>
+          </p:nvPr>
+        </p:nvSpPr>
+        <p:spPr/>
+        <p:txBody>
+          <a:bodyPr/>
+          <a:lstStyle/>
+          <a:p>
+            <a:r>
+              <a:rPr sz="1300"/>
+              <a:t>КЛЮЧОВ АСПЕКТ 2 - КОМЕНТИРАЙ ЦЕЛТА, НЕ ДЕТАЙЛИТЕ (3 мин.)</a:t>
+            </a:r>
+          </a:p>
+          <a:p>
+            <a:r>
+              <a:rPr sz="1300"/>
+              <a:t>Покажете примера. Задайте: "Какво НЕ ни казва кодът без коментар?"</a:t>
+            </a:r>
+          </a:p>
+          <a:p>
+            <a:r>
+              <a:rPr sz="1300"/>
+              <a:t>Отговор: ЗАЩО търсим 'command-word terminator' - бизнес причината.</a:t>
+            </a:r>
+          </a:p>
+          <a:p>
+            <a:r>
+              <a:rPr sz="1300"/>
+              <a:t>Обяснете: "i &lt; strlen(cmd) е ясно КАК. Коментарът трябва да каже ЗАЩО."</a:t>
+            </a:r>
+          </a:p>
+          <a:p>
+            <a:r>
+              <a:rPr sz="1300"/>
+              <a:t>Дайте пример: "Ако имате timeout = 30000; - добавете: // 30 секунди, изискване от клиента"</a:t>
+            </a:r>
+          </a:p>
+          <a:p>
+            <a:r>
+              <a:rPr sz="1300"/>
+              <a:t>Акцент: "Коментирайте НАМЕРЕНИЕТО, не изпълнението."</a:t>
+            </a:r>
+          </a:p>
+        </p:txBody>
+      </p:sp>
+      <p:sp>
+        <p:nvSpPr>
+          <p:cNvPr id="4" name="Slide Number Placeholder 3"/>
+          <p:cNvSpPr>
+            <a:spLocks noGrp="1"/>
+          </p:cNvSpPr>
+          <p:nvPr>
+            <p:ph type="sldNum" idx="5" sz="quarter"/>
+          </p:nvPr>
+        </p:nvSpPr>
+        <p:spPr/>
+      </p:sp>
+    </p:spTree>
+  </p:cSld>
+  <p:clrMapOvr>
+    <a:masterClrMapping/>
+  </p:clrMapOvr>
+</p:notes>
+</file>
+
+<file path=ppt/notesSlides/notesSlide23.xml><?xml version="1.0" encoding="utf-8"?>
+<p:notes xmlns:a="http://schemas.openxmlformats.org/drawingml/2006/main" xmlns:p="http://schemas.openxmlformats.org/presentationml/2006/main" xmlns:r="http://schemas.openxmlformats.org/officeDocument/2006/relationships">
+  <p:cSld>
+    <p:spTree>
+      <p:nvGrpSpPr>
+        <p:cNvPr id="1" name=""/>
+        <p:cNvGrpSpPr/>
+        <p:nvPr/>
+      </p:nvGrpSpPr>
+      <p:grpSpPr>
+        <a:xfrm>
+          <a:off x="0" y="0"/>
+          <a:ext cx="0" cy="0"/>
+          <a:chOff x="0" y="0"/>
+          <a:chExt cx="0" cy="0"/>
+        </a:xfrm>
+      </p:grpSpPr>
+      <p:sp>
+        <p:nvSpPr>
+          <p:cNvPr id="2" name="Slide Image Placeholder 1"/>
+          <p:cNvSpPr>
+            <a:spLocks noGrp="1"/>
+          </p:cNvSpPr>
+          <p:nvPr>
+            <p:ph type="sldImg" idx="2"/>
+          </p:nvPr>
+        </p:nvSpPr>
+        <p:spPr/>
+      </p:sp>
+      <p:sp>
+        <p:nvSpPr>
+          <p:cNvPr id="3" name="Notes Placeholder 2"/>
+          <p:cNvSpPr>
+            <a:spLocks noGrp="1"/>
+          </p:cNvSpPr>
+          <p:nvPr>
+            <p:ph type="body" idx="3" sz="quarter"/>
+          </p:nvPr>
+        </p:nvSpPr>
+        <p:spPr/>
+        <p:txBody>
+          <a:bodyPr/>
+          <a:lstStyle/>
+          <a:p>
+            <a:r>
+              <a:rPr sz="1300"/>
+              <a:t>КЛЮЧОВ АСПЕКТ 3 - ПО-ДОБЪР КОД = ПО-МАЛКО КОМЕНТАРИ (2 мин.)</a:t>
+            </a:r>
+          </a:p>
+          <a:p>
+            <a:r>
+              <a:rPr sz="1300"/>
+              <a:t>Покажете двата варианта. Задайте: "Кой е по-лесен за четене?"</a:t>
+            </a:r>
+          </a:p>
+          <a:p>
+            <a:r>
+              <a:rPr sz="1300"/>
+              <a:t>Отговор: вторият - защото има по-добри имена и не се нуждае от коментар.</a:t>
+            </a:r>
+          </a:p>
+          <a:p>
+            <a:r>
+              <a:rPr sz="1300"/>
+              <a:t>Акцент: "Всеки коментар, от който можете да се освободите чрез по-добро именуване - освободете се."</a:t>
+            </a:r>
+          </a:p>
+          <a:p>
+            <a:r>
+              <a:rPr sz="1300"/>
+              <a:t>Практика: "Когато пишете коментар, запитайте се: мога ли да преименувам вместо това?"</a:t>
+            </a:r>
+          </a:p>
+        </p:txBody>
+      </p:sp>
+      <p:sp>
+        <p:nvSpPr>
+          <p:cNvPr id="4" name="Slide Number Placeholder 3"/>
+          <p:cNvSpPr>
+            <a:spLocks noGrp="1"/>
+          </p:cNvSpPr>
+          <p:nvPr>
+            <p:ph type="sldNum" idx="5" sz="quarter"/>
+          </p:nvPr>
+        </p:nvSpPr>
+        <p:spPr/>
+      </p:sp>
+    </p:spTree>
+  </p:cSld>
+  <p:clrMapOvr>
+    <a:masterClrMapping/>
+  </p:clrMapOvr>
+</p:notes>
+</file>
+
+<file path=ppt/notesSlides/notesSlide24.xml><?xml version="1.0" encoding="utf-8"?>
+<p:notes xmlns:a="http://schemas.openxmlformats.org/drawingml/2006/main" xmlns:p="http://schemas.openxmlformats.org/presentationml/2006/main" xmlns:r="http://schemas.openxmlformats.org/officeDocument/2006/relationships">
+  <p:cSld>
+    <p:spTree>
+      <p:nvGrpSpPr>
+        <p:cNvPr id="1" name=""/>
+        <p:cNvGrpSpPr/>
+        <p:nvPr/>
+      </p:nvGrpSpPr>
+      <p:grpSpPr>
+        <a:xfrm>
+          <a:off x="0" y="0"/>
+          <a:ext cx="0" cy="0"/>
+          <a:chOff x="0" y="0"/>
+          <a:chExt cx="0" cy="0"/>
+        </a:xfrm>
+      </p:grpSpPr>
+      <p:sp>
+        <p:nvSpPr>
+          <p:cNvPr id="2" name="Slide Image Placeholder 1"/>
+          <p:cNvSpPr>
+            <a:spLocks noGrp="1"/>
+          </p:cNvSpPr>
+          <p:nvPr>
+            <p:ph type="sldImg" idx="2"/>
+          </p:nvPr>
+        </p:nvSpPr>
+        <p:spPr/>
+      </p:sp>
+      <p:sp>
+        <p:nvSpPr>
+          <p:cNvPr id="3" name="Notes Placeholder 2"/>
+          <p:cNvSpPr>
+            <a:spLocks noGrp="1"/>
+          </p:cNvSpPr>
+          <p:nvPr>
+            <p:ph type="body" idx="3" sz="quarter"/>
+          </p:nvPr>
+        </p:nvSpPr>
+        <p:spPr/>
+        <p:txBody>
+          <a:bodyPr/>
+          <a:lstStyle/>
+          <a:p>
+            <a:r>
+              <a:rPr sz="1300"/>
+              <a:t>КЛЮЧОВ АСПЕКТ 4 - АБЗАЦНИ КОМЕНТАРИ (2 мин.)</a:t>
+            </a:r>
+          </a:p>
+          <a:p>
+            <a:r>
+              <a:rPr sz="1300"/>
+              <a:t>Задайте: "Коментарите над блок код - какво трябва да казват?"</a:t>
+            </a:r>
+          </a:p>
+          <a:p>
+            <a:r>
+              <a:rPr sz="1300"/>
+              <a:t>Отговор: ЗАЩО, не КАК - вече го знаем от предишния аспект.</a:t>
+            </a:r>
+          </a:p>
+          <a:p>
+            <a:r>
+              <a:rPr sz="1300"/>
+              <a:t>Ново: "Подготвят читателя за следващия блок - като заглавие на параграф."</a:t>
+            </a:r>
+          </a:p>
+          <a:p>
+            <a:r>
+              <a:rPr sz="1300"/>
+              <a:t>Практика: "Избягвайте съкращения - пишете numberOfStudents, не numSt."</a:t>
+            </a:r>
+          </a:p>
+          <a:p>
+            <a:r>
+              <a:rPr sz="1300"/>
+              <a:t>Бързо: тези правила важат и при code review - ще ги ползвате в екипна работа.</a:t>
+            </a:r>
+          </a:p>
+        </p:txBody>
+      </p:sp>
+      <p:sp>
+        <p:nvSpPr>
+          <p:cNvPr id="4" name="Slide Number Placeholder 3"/>
+          <p:cNvSpPr>
+            <a:spLocks noGrp="1"/>
+          </p:cNvSpPr>
+          <p:nvPr>
+            <p:ph type="sldNum" idx="5" sz="quarter"/>
+          </p:nvPr>
+        </p:nvSpPr>
+        <p:spPr/>
+      </p:sp>
+    </p:spTree>
+  </p:cSld>
+  <p:clrMapOvr>
+    <a:masterClrMapping/>
+  </p:clrMapOvr>
+</p:notes>
+</file>
+
+<file path=ppt/notesSlides/notesSlide25.xml><?xml version="1.0" encoding="utf-8"?>
+<p:notes xmlns:a="http://schemas.openxmlformats.org/drawingml/2006/main" xmlns:p="http://schemas.openxmlformats.org/presentationml/2006/main" xmlns:r="http://schemas.openxmlformats.org/officeDocument/2006/relationships">
+  <p:cSld>
+    <p:spTree>
+      <p:nvGrpSpPr>
+        <p:cNvPr id="1" name=""/>
+        <p:cNvGrpSpPr/>
+        <p:nvPr/>
+      </p:nvGrpSpPr>
+      <p:grpSpPr>
+        <a:xfrm>
+          <a:off x="0" y="0"/>
+          <a:ext cx="0" cy="0"/>
+          <a:chOff x="0" y="0"/>
+          <a:chExt cx="0" cy="0"/>
+        </a:xfrm>
+      </p:grpSpPr>
+      <p:sp>
+        <p:nvSpPr>
+          <p:cNvPr id="2" name="Slide Image Placeholder 1"/>
+          <p:cNvSpPr>
+            <a:spLocks noGrp="1"/>
+          </p:cNvSpPr>
+          <p:nvPr>
+            <p:ph type="sldImg" idx="2"/>
+          </p:nvPr>
+        </p:nvSpPr>
+        <p:spPr/>
+      </p:sp>
+      <p:sp>
+        <p:nvSpPr>
+          <p:cNvPr id="3" name="Notes Placeholder 2"/>
+          <p:cNvSpPr>
+            <a:spLocks noGrp="1"/>
+          </p:cNvSpPr>
+          <p:nvPr>
+            <p:ph type="body" idx="3" sz="quarter"/>
+          </p:nvPr>
+        </p:nvSpPr>
+        <p:spPr/>
+        <p:txBody>
+          <a:bodyPr/>
+          <a:lstStyle/>
+          <a:p>
+            <a:r>
+              <a:rPr sz="1300"/>
+              <a:t>КЛЮЧОВ АСПЕКТ 5 - WORKAROUND-И И ИНСТРУМЕНТИ (3 мин.)</a:t>
+            </a:r>
+          </a:p>
+          <a:p>
+            <a:r>
+              <a:rPr sz="1300"/>
+              <a:t>Задайте: "Кога ТРЯБВА да коментирате, дори кодът да е ясен?"</a:t>
+            </a:r>
+          </a:p>
+          <a:p>
+            <a:r>
+              <a:rPr sz="1300"/>
+              <a:t>Отговор: при заобиколни решения - Bug #3712, при недокументирани функции.</a:t>
+            </a:r>
+          </a:p>
+          <a:p>
+            <a:r>
+              <a:rPr sz="1300"/>
+              <a:t>Обяснете: "Без такъв коментар следващият разработчик ще 'оправи' кода и ще счупи нещо."</a:t>
+            </a:r>
+          </a:p>
+          <a:p>
+            <a:r>
+              <a:rPr sz="1300"/>
+              <a:t>Ключово: "Не коментирайте СЛОЖЕН код - ПРЕНАПИШЕТЕ го. Последователно правило."</a:t>
+            </a:r>
+          </a:p>
+          <a:p>
+            <a:r>
+              <a:rPr sz="1300"/>
+              <a:t>Преход: "Нека видим как се документира на по-високо ниво - класове и файлове."</a:t>
+            </a:r>
+          </a:p>
+        </p:txBody>
+      </p:sp>
+      <p:sp>
+        <p:nvSpPr>
+          <p:cNvPr id="4" name="Slide Number Placeholder 3"/>
+          <p:cNvSpPr>
+            <a:spLocks noGrp="1"/>
+          </p:cNvSpPr>
+          <p:nvPr>
+            <p:ph type="sldNum" idx="5" sz="quarter"/>
+          </p:nvPr>
+        </p:nvSpPr>
+        <p:spPr/>
+      </p:sp>
+    </p:spTree>
+  </p:cSld>
+  <p:clrMapOvr>
+    <a:masterClrMapping/>
+  </p:clrMapOvr>
+</p:notes>
+</file>
+
+<file path=ppt/notesSlides/notesSlide26.xml><?xml version="1.0" encoding="utf-8"?>
+<p:notes xmlns:a="http://schemas.openxmlformats.org/drawingml/2006/main" xmlns:p="http://schemas.openxmlformats.org/presentationml/2006/main" xmlns:r="http://schemas.openxmlformats.org/officeDocument/2006/relationships">
+  <p:cSld>
+    <p:spTree>
+      <p:nvGrpSpPr>
+        <p:cNvPr id="1" name=""/>
+        <p:cNvGrpSpPr/>
+        <p:nvPr/>
+      </p:nvGrpSpPr>
+      <p:grpSpPr>
+        <a:xfrm>
+          <a:off x="0" y="0"/>
+          <a:ext cx="0" cy="0"/>
+          <a:chOff x="0" y="0"/>
+          <a:chExt cx="0" cy="0"/>
+        </a:xfrm>
+      </p:grpSpPr>
+      <p:sp>
+        <p:nvSpPr>
+          <p:cNvPr id="2" name="Slide Image Placeholder 1"/>
+          <p:cNvSpPr>
+            <a:spLocks noGrp="1"/>
+          </p:cNvSpPr>
+          <p:nvPr>
+            <p:ph type="sldImg" idx="2"/>
+          </p:nvPr>
+        </p:nvSpPr>
+        <p:spPr/>
+      </p:sp>
+      <p:sp>
+        <p:nvSpPr>
+          <p:cNvPr id="3" name="Notes Placeholder 2"/>
+          <p:cNvSpPr>
+            <a:spLocks noGrp="1"/>
+          </p:cNvSpPr>
+          <p:nvPr>
+            <p:ph type="body" idx="3" sz="quarter"/>
+          </p:nvPr>
+        </p:nvSpPr>
+        <p:spPr/>
+        <p:txBody>
+          <a:bodyPr/>
+          <a:lstStyle/>
+          <a:p>
+            <a:r>
+              <a:rPr sz="1300"/>
+              <a:t>XML ДОКУМЕНТАЦИЯ В C# - ВЪВЕДЕНИЕ (3 мин.)</a:t>
+            </a:r>
+          </a:p>
+          <a:p>
+            <a:r>
+              <a:rPr sz="1300"/>
+              <a:t>Демонстрирайте в IDE (ако е налично): напишете '///' над метод -&gt; VS автоматично генерира шаблон.</a:t>
+            </a:r>
+          </a:p>
+          <a:p>
+            <a:r>
+              <a:rPr sz="1300"/>
+              <a:t>Ако нямате IDE: покажете примера от слайда и посочете структурата.</a:t>
+            </a:r>
+          </a:p>
+          <a:p>
+            <a:r>
+              <a:rPr sz="1300"/>
+              <a:t>Акцент: "XML doc коментарите НЕ са в компилирания код - генерира се отделен .xml файл."</a:t>
+            </a:r>
+          </a:p>
+          <a:p>
+            <a:r>
+              <a:rPr sz="1300"/>
+              <a:t>Задайте: "Как мислите - кой ползва този .xml файл?" -&gt; Отговор: IntelliSense в IDE, Sandcastle.</a:t>
+            </a:r>
+          </a:p>
+        </p:txBody>
+      </p:sp>
+      <p:sp>
+        <p:nvSpPr>
+          <p:cNvPr id="4" name="Slide Number Placeholder 3"/>
+          <p:cNvSpPr>
+            <a:spLocks noGrp="1"/>
+          </p:cNvSpPr>
+          <p:nvPr>
+            <p:ph type="sldNum" idx="5" sz="quarter"/>
+          </p:nvPr>
+        </p:nvSpPr>
+        <p:spPr/>
+      </p:sp>
+    </p:spTree>
+  </p:cSld>
+  <p:clrMapOvr>
+    <a:masterClrMapping/>
+  </p:clrMapOvr>
+</p:notes>
+</file>
+
+<file path=ppt/notesSlides/notesSlide27.xml><?xml version="1.0" encoding="utf-8"?>
+<p:notes xmlns:a="http://schemas.openxmlformats.org/drawingml/2006/main" xmlns:p="http://schemas.openxmlformats.org/presentationml/2006/main" xmlns:r="http://schemas.openxmlformats.org/officeDocument/2006/relationships">
+  <p:cSld>
+    <p:spTree>
+      <p:nvGrpSpPr>
+        <p:cNvPr id="1" name=""/>
+        <p:cNvGrpSpPr/>
+        <p:nvPr/>
+      </p:nvGrpSpPr>
+      <p:grpSpPr>
+        <a:xfrm>
+          <a:off x="0" y="0"/>
+          <a:ext cx="0" cy="0"/>
+          <a:chOff x="0" y="0"/>
+          <a:chExt cx="0" cy="0"/>
+        </a:xfrm>
+      </p:grpSpPr>
+      <p:sp>
+        <p:nvSpPr>
+          <p:cNvPr id="2" name="Slide Image Placeholder 1"/>
+          <p:cNvSpPr>
+            <a:spLocks noGrp="1"/>
+          </p:cNvSpPr>
+          <p:nvPr>
+            <p:ph type="sldImg" idx="2"/>
+          </p:nvPr>
+        </p:nvSpPr>
+        <p:spPr/>
+      </p:sp>
+      <p:sp>
+        <p:nvSpPr>
+          <p:cNvPr id="3" name="Notes Placeholder 2"/>
+          <p:cNvSpPr>
+            <a:spLocks noGrp="1"/>
+          </p:cNvSpPr>
+          <p:nvPr>
+            <p:ph type="body" idx="3" sz="quarter"/>
+          </p:nvPr>
+        </p:nvSpPr>
+        <p:spPr/>
+        <p:txBody>
+          <a:bodyPr/>
+          <a:lstStyle/>
+          <a:p>
+            <a:r>
+              <a:rPr sz="1300"/>
+              <a:t>XML ТАГОВЕ - Ч.1 (3 мин.)</a:t>
+            </a:r>
+          </a:p>
+          <a:p>
+            <a:r>
+              <a:rPr sz="1300"/>
+              <a:t>Минете таговете с примери:</a:t>
+            </a:r>
+          </a:p>
+          <a:p>
+            <a:r>
+              <a:rPr sz="1300"/>
+              <a:t>  &lt;summary&gt; - задължителен, кратко описание</a:t>
+            </a:r>
+          </a:p>
+          <a:p>
+            <a:r>
+              <a:rPr sz="1300"/>
+              <a:t>  &lt;param name='x'&gt; - за всеки параметър</a:t>
+            </a:r>
+          </a:p>
+          <a:p>
+            <a:r>
+              <a:rPr sz="1300"/>
+              <a:t>  &lt;returns&gt; - какво връща методът</a:t>
+            </a:r>
+          </a:p>
+          <a:p>
+            <a:r>
+              <a:rPr sz="1300"/>
+              <a:t>  &lt;remarks&gt; - допълнителни бележки</a:t>
+            </a:r>
+          </a:p>
+          <a:p>
+            <a:r>
+              <a:rPr sz="1300"/>
+              <a:t>Практика: "В Visual Studio: напишете '///' и Tab - IDE попълва параметрите автоматично."</a:t>
+            </a:r>
+          </a:p>
+          <a:p>
+            <a:r>
+              <a:rPr sz="1300"/>
+              <a:t>Задайте: "Какъв таг ще ползвате, за да опишете параметъра n на рекурсивен метод?"</a:t>
+            </a:r>
+          </a:p>
+        </p:txBody>
+      </p:sp>
+      <p:sp>
+        <p:nvSpPr>
+          <p:cNvPr id="4" name="Slide Number Placeholder 3"/>
+          <p:cNvSpPr>
+            <a:spLocks noGrp="1"/>
+          </p:cNvSpPr>
+          <p:nvPr>
+            <p:ph type="sldNum" idx="5" sz="quarter"/>
+          </p:nvPr>
+        </p:nvSpPr>
+        <p:spPr/>
+      </p:sp>
+    </p:spTree>
+  </p:cSld>
+  <p:clrMapOvr>
+    <a:masterClrMapping/>
+  </p:clrMapOvr>
+</p:notes>
+</file>
+
+<file path=ppt/notesSlides/notesSlide28.xml><?xml version="1.0" encoding="utf-8"?>
+<p:notes xmlns:a="http://schemas.openxmlformats.org/drawingml/2006/main" xmlns:p="http://schemas.openxmlformats.org/presentationml/2006/main" xmlns:r="http://schemas.openxmlformats.org/officeDocument/2006/relationships">
+  <p:cSld>
+    <p:spTree>
+      <p:nvGrpSpPr>
+        <p:cNvPr id="1" name=""/>
+        <p:cNvGrpSpPr/>
+        <p:nvPr/>
+      </p:nvGrpSpPr>
+      <p:grpSpPr>
+        <a:xfrm>
+          <a:off x="0" y="0"/>
+          <a:ext cx="0" cy="0"/>
+          <a:chOff x="0" y="0"/>
+          <a:chExt cx="0" cy="0"/>
+        </a:xfrm>
+      </p:grpSpPr>
+      <p:sp>
+        <p:nvSpPr>
+          <p:cNvPr id="2" name="Slide Image Placeholder 1"/>
+          <p:cNvSpPr>
+            <a:spLocks noGrp="1"/>
+          </p:cNvSpPr>
+          <p:nvPr>
+            <p:ph type="sldImg" idx="2"/>
+          </p:nvPr>
+        </p:nvSpPr>
+        <p:spPr/>
+      </p:sp>
+      <p:sp>
+        <p:nvSpPr>
+          <p:cNvPr id="3" name="Notes Placeholder 2"/>
+          <p:cNvSpPr>
+            <a:spLocks noGrp="1"/>
+          </p:cNvSpPr>
+          <p:nvPr>
+            <p:ph type="body" idx="3" sz="quarter"/>
+          </p:nvPr>
+        </p:nvSpPr>
+        <p:spPr/>
+        <p:txBody>
+          <a:bodyPr/>
+          <a:lstStyle/>
+          <a:p>
+            <a:r>
+              <a:rPr sz="1300"/>
+              <a:t>XML ТАГОВЕ - Ч.2 (2 мин.)</a:t>
+            </a:r>
+          </a:p>
+          <a:p>
+            <a:r>
+              <a:rPr sz="1300"/>
+              <a:t>Обяснете накратко:</a:t>
+            </a:r>
+          </a:p>
+          <a:p>
+            <a:r>
+              <a:rPr sz="1300"/>
+              <a:t>  &lt;c&gt; и &lt;code&gt; - форматиране на код в документацията</a:t>
+            </a:r>
+          </a:p>
+          <a:p>
+            <a:r>
+              <a:rPr sz="1300"/>
+              <a:t>  &lt;see cref='ClassName'&gt; - кликаем линк в IDE</a:t>
+            </a:r>
+          </a:p>
+          <a:p>
+            <a:r>
+              <a:rPr sz="1300"/>
+              <a:t>  &lt;exception cref='Ex'&gt; - какви изключения може да хвърли методът</a:t>
+            </a:r>
+          </a:p>
+          <a:p>
+            <a:r>
+              <a:rPr sz="1300"/>
+              <a:t>Акцент: "&lt;exception&gt; е особено важен - потребителите на метода трябва да знаят какво да очакват."</a:t>
+            </a:r>
+          </a:p>
+          <a:p>
+            <a:r>
+              <a:rPr sz="1300"/>
+              <a:t>Посочете линка към MSDN за пълния списък с тагове.</a:t>
+            </a:r>
+          </a:p>
+        </p:txBody>
+      </p:sp>
+      <p:sp>
+        <p:nvSpPr>
+          <p:cNvPr id="4" name="Slide Number Placeholder 3"/>
+          <p:cNvSpPr>
+            <a:spLocks noGrp="1"/>
+          </p:cNvSpPr>
+          <p:nvPr>
+            <p:ph type="sldNum" idx="5" sz="quarter"/>
+          </p:nvPr>
+        </p:nvSpPr>
+        <p:spPr/>
+      </p:sp>
+    </p:spTree>
+  </p:cSld>
+  <p:clrMapOvr>
+    <a:masterClrMapping/>
+  </p:clrMapOvr>
+</p:notes>
+</file>
+
+<file path=ppt/notesSlides/notesSlide29.xml><?xml version="1.0" encoding="utf-8"?>
+<p:notes xmlns:a="http://schemas.openxmlformats.org/drawingml/2006/main" xmlns:p="http://schemas.openxmlformats.org/presentationml/2006/main" xmlns:r="http://schemas.openxmlformats.org/officeDocument/2006/relationships">
+  <p:cSld>
+    <p:spTree>
+      <p:nvGrpSpPr>
+        <p:cNvPr id="1" name=""/>
+        <p:cNvGrpSpPr/>
+        <p:nvPr/>
+      </p:nvGrpSpPr>
+      <p:grpSpPr>
+        <a:xfrm>
+          <a:off x="0" y="0"/>
+          <a:ext cx="0" cy="0"/>
+          <a:chOff x="0" y="0"/>
+          <a:chExt cx="0" cy="0"/>
+        </a:xfrm>
+      </p:grpSpPr>
+      <p:sp>
+        <p:nvSpPr>
+          <p:cNvPr id="2" name="Slide Image Placeholder 1"/>
+          <p:cNvSpPr>
+            <a:spLocks noGrp="1"/>
+          </p:cNvSpPr>
+          <p:nvPr>
+            <p:ph type="sldImg" idx="2"/>
+          </p:nvPr>
+        </p:nvSpPr>
+        <p:spPr/>
+      </p:sp>
+      <p:sp>
+        <p:nvSpPr>
+          <p:cNvPr id="3" name="Notes Placeholder 2"/>
+          <p:cNvSpPr>
+            <a:spLocks noGrp="1"/>
+          </p:cNvSpPr>
+          <p:nvPr>
+            <p:ph type="body" idx="3" sz="quarter"/>
+          </p:nvPr>
+        </p:nvSpPr>
+        <p:spPr/>
+        <p:txBody>
+          <a:bodyPr/>
+          <a:lstStyle/>
+          <a:p>
+            <a:r>
+              <a:rPr sz="1300"/>
+              <a:t>ПРИМЕР ЗА XML ДОКУМЕНТАЦИЯ (3 мин.)</a:t>
+            </a:r>
+          </a:p>
+          <a:p>
+            <a:r>
+              <a:rPr sz="1300"/>
+              <a:t>Разгледайте примера заедно с класа:</a:t>
+            </a:r>
+          </a:p>
+          <a:p>
+            <a:r>
+              <a:rPr sz="1300"/>
+              <a:t>  Посочете &lt;summary&gt;, &lt;example&gt;, &lt;code&gt;, &lt;see cref&gt; в кода.</a:t>
+            </a:r>
+          </a:p>
+          <a:p>
+            <a:r>
+              <a:rPr sz="1300"/>
+              <a:t>Задача: "Ако трябва да документирате метод Divide(int a, int b) - какви тагове ще ползвате?"</a:t>
+            </a:r>
+          </a:p>
+          <a:p>
+            <a:r>
+              <a:rPr sz="1300"/>
+              <a:t>Очакван отговор: &lt;summary&gt;, &lt;param name='a'&gt;, &lt;param name='b'&gt;, &lt;returns&gt;, &lt;exception cref='DivideByZeroException'&gt;.</a:t>
+            </a:r>
+          </a:p>
+          <a:p>
+            <a:r>
+              <a:rPr sz="1300"/>
+              <a:t>Кажете: "Нека го напишем заедно." - напишете на дъска или в IDE.</a:t>
+            </a:r>
+          </a:p>
+        </p:txBody>
+      </p:sp>
+      <p:sp>
+        <p:nvSpPr>
+          <p:cNvPr id="4" name="Slide Number Placeholder 3"/>
+          <p:cNvSpPr>
+            <a:spLocks noGrp="1"/>
+          </p:cNvSpPr>
+          <p:nvPr>
+            <p:ph type="sldNum" idx="5" sz="quarter"/>
+          </p:nvPr>
+        </p:nvSpPr>
+        <p:spPr/>
+      </p:sp>
+    </p:spTree>
   </p:cSld>
   <p:clrMapOvr>
     <a:masterClrMapping/>
@@ -2442,14 +4464,34 @@
           <a:lstStyle/>
           <a:p>
             <a:r>
-              <a:rPr lang="en-US" dirty="0"/>
-              <a:t>Comment does not add anything</a:t>
-            </a:r>
-            <a:r>
-              <a:rPr lang="en-US" baseline="0" dirty="0"/>
-              <a:t> to the code</a:t>
+              <a:rPr sz="1300"/>
+              <a:t>КОМЕНТАРИ, ПОВТАРЯЩИ КОДА (2 мин.)</a:t>
             </a:r>
             <a:endParaRPr lang="en-US" dirty="0"/>
+          </a:p>
+          <a:p>
+            <a:r>
+              <a:rPr sz="1300"/>
+              <a:t>Покажете примера и попитайте: "Изтрийте коментарите мислено - губим ли информация?"</a:t>
+            </a:r>
+          </a:p>
+          <a:p>
+            <a:r>
+              <a:rPr sz="1300"/>
+              <a:t>Посочете: "// increment i - очевидно, вижда се от i++."</a:t>
+            </a:r>
+          </a:p>
+          <a:p>
+            <a:r>
+              <a:rPr sz="1300"/>
+              <a:t>Кажете: "Тези коментари само шумят. Четецът чете ДВОЙНО количество текст без полза."</a:t>
+            </a:r>
+          </a:p>
+          <a:p>
+            <a:r>
+              <a:rPr sz="1300"/>
+              <a:t>Задайте: "Кой е написал такъв коментар? Сега знаете да не го правите."</a:t>
+            </a:r>
           </a:p>
         </p:txBody>
       </p:sp>
@@ -2558,6 +4600,297 @@
         <p14:creationId xmlns:p14="http://schemas.microsoft.com/office/powerpoint/2010/main" val="3627205384"/>
       </p:ext>
     </p:extLst>
+  </p:cSld>
+  <p:clrMapOvr>
+    <a:masterClrMapping/>
+  </p:clrMapOvr>
+</p:notes>
+</file>
+
+<file path=ppt/notesSlides/notesSlide30.xml><?xml version="1.0" encoding="utf-8"?>
+<p:notes xmlns:a="http://schemas.openxmlformats.org/drawingml/2006/main" xmlns:p="http://schemas.openxmlformats.org/presentationml/2006/main" xmlns:r="http://schemas.openxmlformats.org/officeDocument/2006/relationships">
+  <p:cSld>
+    <p:spTree>
+      <p:nvGrpSpPr>
+        <p:cNvPr id="1" name=""/>
+        <p:cNvGrpSpPr/>
+        <p:nvPr/>
+      </p:nvGrpSpPr>
+      <p:grpSpPr>
+        <a:xfrm>
+          <a:off x="0" y="0"/>
+          <a:ext cx="0" cy="0"/>
+          <a:chOff x="0" y="0"/>
+          <a:chExt cx="0" cy="0"/>
+        </a:xfrm>
+      </p:grpSpPr>
+      <p:sp>
+        <p:nvSpPr>
+          <p:cNvPr id="2" name="Slide Image Placeholder 1"/>
+          <p:cNvSpPr>
+            <a:spLocks noGrp="1"/>
+          </p:cNvSpPr>
+          <p:nvPr>
+            <p:ph type="sldImg" idx="2"/>
+          </p:nvPr>
+        </p:nvSpPr>
+        <p:spPr/>
+      </p:sp>
+      <p:sp>
+        <p:nvSpPr>
+          <p:cNvPr id="3" name="Notes Placeholder 2"/>
+          <p:cNvSpPr>
+            <a:spLocks noGrp="1"/>
+          </p:cNvSpPr>
+          <p:nvPr>
+            <p:ph type="body" idx="3" sz="quarter"/>
+          </p:nvPr>
+        </p:nvSpPr>
+        <p:spPr/>
+        <p:txBody>
+          <a:bodyPr/>
+          <a:lstStyle/>
+          <a:p>
+            <a:r>
+              <a:rPr sz="1300"/>
+              <a:t>КОМПИЛИРАНЕ И ИНСТРУМЕНТИ ЗА ДОКУМЕНТАЦИЯ (2 мин.)</a:t>
+            </a:r>
+          </a:p>
+          <a:p>
+            <a:r>
+              <a:rPr sz="1300"/>
+              <a:t>Обяснете кратко:</a:t>
+            </a:r>
+          </a:p>
+          <a:p>
+            <a:r>
+              <a:rPr sz="1300"/>
+              <a:t>  Visual Studio: Project Properties -&gt; Build -&gt; XML documentation file</a:t>
+            </a:r>
+          </a:p>
+          <a:p>
+            <a:r>
+              <a:rPr sz="1300"/>
+              <a:t>  Sandcastle / DocFX: генерират HTML/CHM/PDF от xml файла</a:t>
+            </a:r>
+          </a:p>
+          <a:p>
+            <a:r>
+              <a:rPr sz="1300"/>
+              <a:t>Дайте контекст: "Когато работите в екип, документацията се генерира автоматично при build."</a:t>
+            </a:r>
+          </a:p>
+          <a:p>
+            <a:r>
+              <a:rPr sz="1300"/>
+              <a:t>Не навлизайте в детайли - само покажете идеята. Конкретните инструменти са за бъдещи уроци.</a:t>
+            </a:r>
+          </a:p>
+        </p:txBody>
+      </p:sp>
+      <p:sp>
+        <p:nvSpPr>
+          <p:cNvPr id="4" name="Slide Number Placeholder 3"/>
+          <p:cNvSpPr>
+            <a:spLocks noGrp="1"/>
+          </p:cNvSpPr>
+          <p:nvPr>
+            <p:ph type="sldNum" idx="5" sz="quarter"/>
+          </p:nvPr>
+        </p:nvSpPr>
+        <p:spPr/>
+      </p:sp>
+    </p:spTree>
+  </p:cSld>
+  <p:clrMapOvr>
+    <a:masterClrMapping/>
+  </p:clrMapOvr>
+</p:notes>
+</file>
+
+<file path=ppt/notesSlides/notesSlide31.xml><?xml version="1.0" encoding="utf-8"?>
+<p:notes xmlns:a="http://schemas.openxmlformats.org/drawingml/2006/main" xmlns:p="http://schemas.openxmlformats.org/presentationml/2006/main" xmlns:r="http://schemas.openxmlformats.org/officeDocument/2006/relationships">
+  <p:cSld>
+    <p:spTree>
+      <p:nvGrpSpPr>
+        <p:cNvPr id="1" name=""/>
+        <p:cNvGrpSpPr/>
+        <p:nvPr/>
+      </p:nvGrpSpPr>
+      <p:grpSpPr>
+        <a:xfrm>
+          <a:off x="0" y="0"/>
+          <a:ext cx="0" cy="0"/>
+          <a:chOff x="0" y="0"/>
+          <a:chExt cx="0" cy="0"/>
+        </a:xfrm>
+      </p:grpSpPr>
+      <p:sp>
+        <p:nvSpPr>
+          <p:cNvPr id="2" name="Slide Image Placeholder 1"/>
+          <p:cNvSpPr>
+            <a:spLocks noGrp="1"/>
+          </p:cNvSpPr>
+          <p:nvPr>
+            <p:ph type="sldImg" idx="2"/>
+          </p:nvPr>
+        </p:nvSpPr>
+        <p:spPr/>
+      </p:sp>
+      <p:sp>
+        <p:nvSpPr>
+          <p:cNvPr id="3" name="Notes Placeholder 2"/>
+          <p:cNvSpPr>
+            <a:spLocks noGrp="1"/>
+          </p:cNvSpPr>
+          <p:nvPr>
+            <p:ph type="body" idx="3" sz="quarter"/>
+          </p:nvPr>
+        </p:nvSpPr>
+        <p:spPr/>
+        <p:txBody>
+          <a:bodyPr/>
+          <a:lstStyle/>
+          <a:p>
+            <a:r>
+              <a:rPr sz="1300"/>
+              <a:t>ОБОБЩЕНИЕ (3 мин.)</a:t>
+            </a:r>
+          </a:p>
+          <a:p>
+            <a:r>
+              <a:rPr sz="1300"/>
+              <a:t>Задайте тези въпроси за преговор - изчакайте отговори:</a:t>
+            </a:r>
+          </a:p>
+          <a:p>
+            <a:r>
+              <a:rPr sz="1300"/>
+              <a:t>  "Каква е разликата между лош коментар и добър?"</a:t>
+            </a:r>
+          </a:p>
+          <a:p>
+            <a:r>
+              <a:rPr sz="1300"/>
+              <a:t>  "Кога ТРЯБВА да добавите коментар дори кодът да е ясен?"</a:t>
+            </a:r>
+          </a:p>
+          <a:p>
+            <a:r>
+              <a:rPr sz="1300"/>
+              <a:t>  "Какво е XML документация и как се използва?"</a:t>
+            </a:r>
+          </a:p>
+          <a:p>
+            <a:r>
+              <a:rPr sz="1300"/>
+              <a:t>Ключово послание: "Пишете кода така, че да не се нуждае от обяснение - а когато трябва - обяснете ЗАЩО, не КАК."</a:t>
+            </a:r>
+          </a:p>
+          <a:p>
+            <a:r>
+              <a:rPr sz="1300"/>
+              <a:t>Ако има упражнения: обявете ги сега.</a:t>
+            </a:r>
+          </a:p>
+        </p:txBody>
+      </p:sp>
+      <p:sp>
+        <p:nvSpPr>
+          <p:cNvPr id="4" name="Slide Number Placeholder 3"/>
+          <p:cNvSpPr>
+            <a:spLocks noGrp="1"/>
+          </p:cNvSpPr>
+          <p:nvPr>
+            <p:ph type="sldNum" idx="5" sz="quarter"/>
+          </p:nvPr>
+        </p:nvSpPr>
+        <p:spPr/>
+      </p:sp>
+    </p:spTree>
+  </p:cSld>
+  <p:clrMapOvr>
+    <a:masterClrMapping/>
+  </p:clrMapOvr>
+</p:notes>
+</file>
+
+<file path=ppt/notesSlides/notesSlide32.xml><?xml version="1.0" encoding="utf-8"?>
+<p:notes xmlns:a="http://schemas.openxmlformats.org/drawingml/2006/main" xmlns:p="http://schemas.openxmlformats.org/presentationml/2006/main" xmlns:r="http://schemas.openxmlformats.org/officeDocument/2006/relationships">
+  <p:cSld>
+    <p:spTree>
+      <p:nvGrpSpPr>
+        <p:cNvPr id="1" name=""/>
+        <p:cNvGrpSpPr/>
+        <p:nvPr/>
+      </p:nvGrpSpPr>
+      <p:grpSpPr>
+        <a:xfrm>
+          <a:off x="0" y="0"/>
+          <a:ext cx="0" cy="0"/>
+          <a:chOff x="0" y="0"/>
+          <a:chExt cx="0" cy="0"/>
+        </a:xfrm>
+      </p:grpSpPr>
+      <p:sp>
+        <p:nvSpPr>
+          <p:cNvPr id="2" name="Slide Image Placeholder 1"/>
+          <p:cNvSpPr>
+            <a:spLocks noGrp="1"/>
+          </p:cNvSpPr>
+          <p:nvPr>
+            <p:ph type="sldImg" idx="2"/>
+          </p:nvPr>
+        </p:nvSpPr>
+        <p:spPr/>
+      </p:sp>
+      <p:sp>
+        <p:nvSpPr>
+          <p:cNvPr id="3" name="Notes Placeholder 2"/>
+          <p:cNvSpPr>
+            <a:spLocks noGrp="1"/>
+          </p:cNvSpPr>
+          <p:nvPr>
+            <p:ph type="body" idx="3" sz="quarter"/>
+          </p:nvPr>
+        </p:nvSpPr>
+        <p:spPr/>
+        <p:txBody>
+          <a:bodyPr/>
+          <a:lstStyle/>
+          <a:p>
+            <a:r>
+              <a:rPr sz="1300"/>
+              <a:t>КРАЙ НА ПРЕЗЕНТАЦИЯТА</a:t>
+            </a:r>
+          </a:p>
+          <a:p>
+            <a:r>
+              <a:rPr sz="1300"/>
+              <a:t>Приключете с: "Материалите са достъпни в системата. На следващия час - упражнения."</a:t>
+            </a:r>
+          </a:p>
+          <a:p>
+            <a:r>
+              <a:rPr sz="1300"/>
+              <a:t>Ако са останали въпроси - отговорете сега или насочете към упражненията.</a:t>
+            </a:r>
+          </a:p>
+        </p:txBody>
+      </p:sp>
+      <p:sp>
+        <p:nvSpPr>
+          <p:cNvPr id="4" name="Slide Number Placeholder 3"/>
+          <p:cNvSpPr>
+            <a:spLocks noGrp="1"/>
+          </p:cNvSpPr>
+          <p:nvPr>
+            <p:ph type="sldNum" idx="5" sz="quarter"/>
+          </p:nvPr>
+        </p:nvSpPr>
+        <p:spPr/>
+      </p:sp>
+    </p:spTree>
   </p:cSld>
   <p:clrMapOvr>
     <a:masterClrMapping/>
@@ -2612,14 +4945,40 @@
           <a:lstStyle/>
           <a:p>
             <a:r>
-              <a:rPr lang="en-US" dirty="0"/>
-              <a:t>Comment does not add anything</a:t>
-            </a:r>
-            <a:r>
-              <a:rPr lang="en-US" baseline="0" dirty="0"/>
-              <a:t> to the code</a:t>
+              <a:rPr sz="1300"/>
+              <a:t>НЕ КОМЕНТИРАЙ ЛОШ КОД - ПРЕНАПИШИ ГО (3 мин.)</a:t>
             </a:r>
             <a:endParaRPr lang="en-US" dirty="0"/>
+          </a:p>
+          <a:p>
+            <a:r>
+              <a:rPr sz="1300"/>
+              <a:t>Прочетете правилото: "Не коментирайте лош код, пренапишете го!"</a:t>
+            </a:r>
+          </a:p>
+          <a:p>
+            <a:r>
+              <a:rPr sz="1300"/>
+              <a:t>Покажете примера с Newton-Raphson. Задайте: "Разбирате ли какво прави?"</a:t>
+            </a:r>
+          </a:p>
+          <a:p>
+            <a:r>
+              <a:rPr sz="1300"/>
+              <a:t>Обяснете: "Дори и с коментари сложният код е трудно разбираем."</a:t>
+            </a:r>
+          </a:p>
+          <a:p>
+            <a:r>
+              <a:rPr sz="1300"/>
+              <a:t>Ключово: "Вместо да добавяте коментар, помислете: мога ли да преименувам, да извлека метод, да опростя?"</a:t>
+            </a:r>
+          </a:p>
+          <a:p>
+            <a:r>
+              <a:rPr sz="1300"/>
+              <a:t>Преход: "Нека видим кои аспекти са ключови при ефективното коментиране."</a:t>
+            </a:r>
           </a:p>
         </p:txBody>
       </p:sp>
@@ -2779,7 +5138,41 @@
           <a:bodyPr/>
           <a:lstStyle/>
           <a:p>
+            <a:r>
+              <a:rPr sz="1300"/>
+              <a:t>ДОКУМЕНТАЦИЯ НА НИВО КЛАС И ФАЙЛ (3 мин.)</a:t>
+            </a:r>
             <a:endParaRPr lang="bg-BG" dirty="0"/>
+          </a:p>
+          <a:p>
+            <a:r>
+              <a:rPr sz="1300"/>
+              <a:t>Обяснете: "Това е документацията, която виждате при Code Completion в IDE."</a:t>
+            </a:r>
+          </a:p>
+          <a:p>
+            <a:r>
+              <a:rPr sz="1300"/>
+              <a:t>Акцент: "НЕ документирайте детайли по изпълнението в публичния интерфейс - само какво прави, не как."</a:t>
+            </a:r>
+          </a:p>
+          <a:p>
+            <a:r>
+              <a:rPr sz="1300"/>
+              <a:t>Пример: публичен метод GetAge() -&gt; summary: 'Връща възрастта на студента в години.'</a:t>
+            </a:r>
+          </a:p>
+          <a:p>
+            <a:r>
+              <a:rPr sz="1300"/>
+              <a:t>Задайте: "Защо е важно да именуваме файла според съдържанието?"</a:t>
+            </a:r>
+          </a:p>
+          <a:p>
+            <a:r>
+              <a:rPr sz="1300"/>
+              <a:t>Отговор: при голям проект с хиляди файлове - ориентацията е ключова.</a:t>
+            </a:r>
           </a:p>
         </p:txBody>
       </p:sp>
@@ -2939,7 +5332,47 @@
           <a:bodyPr/>
           <a:lstStyle/>
           <a:p>
+            <a:r>
+              <a:rPr sz="1300"/>
+              <a:t>ОПРАВДАНИЯ ЗА ЛИПСА НА ДОКУМЕНТАЦИЯ (3 мин.)</a:t>
+            </a:r>
             <a:endParaRPr lang="bg-BG" dirty="0"/>
+          </a:p>
+          <a:p>
+            <a:r>
+              <a:rPr sz="1300"/>
+              <a:t>Четете всяко оправдание и ИЗЧАКАЙТЕ учениците да дадат контрааргумент сами:</a:t>
+            </a:r>
+          </a:p>
+          <a:p>
+            <a:r>
+              <a:rPr sz="1300"/>
+              <a:t>  "Нямам Zeit." -&gt; Контра: по-късно дешифрирането отнема повече.</a:t>
+            </a:r>
+          </a:p>
+          <a:p>
+            <a:r>
+              <a:rPr sz="1300"/>
+              <a:t>  "По-късно ще напиша." -&gt; Контра: никой не се връща да пише коментари.</a:t>
+            </a:r>
+          </a:p>
+          <a:p>
+            <a:r>
+              <a:rPr sz="1300"/>
+              <a:t>  "Кодът ми е самоописателен." -&gt; Контра: дори добрият код може да се нуждае от ЗАЩО.</a:t>
+            </a:r>
+          </a:p>
+          <a:p>
+            <a:r>
+              <a:rPr sz="1300"/>
+              <a:t>Завършете с хумор: "Представете се след 6 месеца пред собствения си код без коментари."</a:t>
+            </a:r>
+          </a:p>
+          <a:p>
+            <a:r>
+              <a:rPr sz="1300"/>
+              <a:t>Преход: "Нека видим как C# ни помага с XML документацията."</a:t>
+            </a:r>
           </a:p>
         </p:txBody>
       </p:sp>
@@ -3048,6 +5481,291 @@
         <p14:creationId xmlns:p14="http://schemas.microsoft.com/office/powerpoint/2010/main" val="2066081620"/>
       </p:ext>
     </p:extLst>
+  </p:cSld>
+  <p:clrMapOvr>
+    <a:masterClrMapping/>
+  </p:clrMapOvr>
+</p:notes>
+</file>
+
+<file path=ppt/notesSlides/notesSlide7.xml><?xml version="1.0" encoding="utf-8"?>
+<p:notes xmlns:a="http://schemas.openxmlformats.org/drawingml/2006/main" xmlns:p="http://schemas.openxmlformats.org/presentationml/2006/main" xmlns:r="http://schemas.openxmlformats.org/officeDocument/2006/relationships">
+  <p:cSld>
+    <p:spTree>
+      <p:nvGrpSpPr>
+        <p:cNvPr id="1" name=""/>
+        <p:cNvGrpSpPr/>
+        <p:nvPr/>
+      </p:nvGrpSpPr>
+      <p:grpSpPr>
+        <a:xfrm>
+          <a:off x="0" y="0"/>
+          <a:ext cx="0" cy="0"/>
+          <a:chOff x="0" y="0"/>
+          <a:chExt cx="0" cy="0"/>
+        </a:xfrm>
+      </p:grpSpPr>
+      <p:sp>
+        <p:nvSpPr>
+          <p:cNvPr id="2" name="Slide Image Placeholder 1"/>
+          <p:cNvSpPr>
+            <a:spLocks noGrp="1"/>
+          </p:cNvSpPr>
+          <p:nvPr>
+            <p:ph type="sldImg" idx="2"/>
+          </p:nvPr>
+        </p:nvSpPr>
+        <p:spPr/>
+      </p:sp>
+      <p:sp>
+        <p:nvSpPr>
+          <p:cNvPr id="3" name="Notes Placeholder 2"/>
+          <p:cNvSpPr>
+            <a:spLocks noGrp="1"/>
+          </p:cNvSpPr>
+          <p:nvPr>
+            <p:ph type="body" idx="3" sz="quarter"/>
+          </p:nvPr>
+        </p:nvSpPr>
+        <p:spPr/>
+        <p:txBody>
+          <a:bodyPr/>
+          <a:lstStyle/>
+          <a:p>
+            <a:r>
+              <a:rPr sz="1300"/>
+              <a:t>ВСТЪПЛЕНИЕ (1-2 мин.)</a:t>
+            </a:r>
+          </a:p>
+          <a:p>
+            <a:r>
+              <a:rPr sz="1300"/>
+              <a:t>Кажете: "Днес ще говорим за нещо, което изглежда лесно, но повечето програмисти го правят зле - коментарите и документацията."</a:t>
+            </a:r>
+          </a:p>
+          <a:p>
+            <a:r>
+              <a:rPr sz="1300"/>
+              <a:t>Въпрос за загряване: "Кой от вас е чел чужд код и не е разбрал какво прави?" - изчакайте реакция.</a:t>
+            </a:r>
+          </a:p>
+          <a:p>
+            <a:r>
+              <a:rPr sz="1300"/>
+              <a:t>Целта е да провокирате интерес ПРЕДИ да покажете съдържанието.</a:t>
+            </a:r>
+          </a:p>
+        </p:txBody>
+      </p:sp>
+      <p:sp>
+        <p:nvSpPr>
+          <p:cNvPr id="4" name="Slide Number Placeholder 3"/>
+          <p:cNvSpPr>
+            <a:spLocks noGrp="1"/>
+          </p:cNvSpPr>
+          <p:nvPr>
+            <p:ph type="sldNum" idx="5" sz="quarter"/>
+          </p:nvPr>
+        </p:nvSpPr>
+        <p:spPr/>
+      </p:sp>
+    </p:spTree>
+  </p:cSld>
+  <p:clrMapOvr>
+    <a:masterClrMapping/>
+  </p:clrMapOvr>
+</p:notes>
+</file>
+
+<file path=ppt/notesSlides/notesSlide8.xml><?xml version="1.0" encoding="utf-8"?>
+<p:notes xmlns:a="http://schemas.openxmlformats.org/drawingml/2006/main" xmlns:p="http://schemas.openxmlformats.org/presentationml/2006/main" xmlns:r="http://schemas.openxmlformats.org/officeDocument/2006/relationships">
+  <p:cSld>
+    <p:spTree>
+      <p:nvGrpSpPr>
+        <p:cNvPr id="1" name=""/>
+        <p:cNvGrpSpPr/>
+        <p:nvPr/>
+      </p:nvGrpSpPr>
+      <p:grpSpPr>
+        <a:xfrm>
+          <a:off x="0" y="0"/>
+          <a:ext cx="0" cy="0"/>
+          <a:chOff x="0" y="0"/>
+          <a:chExt cx="0" cy="0"/>
+        </a:xfrm>
+      </p:grpSpPr>
+      <p:sp>
+        <p:nvSpPr>
+          <p:cNvPr id="2" name="Slide Image Placeholder 1"/>
+          <p:cNvSpPr>
+            <a:spLocks noGrp="1"/>
+          </p:cNvSpPr>
+          <p:nvPr>
+            <p:ph type="sldImg" idx="2"/>
+          </p:nvPr>
+        </p:nvSpPr>
+        <p:spPr/>
+      </p:sp>
+      <p:sp>
+        <p:nvSpPr>
+          <p:cNvPr id="3" name="Notes Placeholder 2"/>
+          <p:cNvSpPr>
+            <a:spLocks noGrp="1"/>
+          </p:cNvSpPr>
+          <p:nvPr>
+            <p:ph type="body" idx="3" sz="quarter"/>
+          </p:nvPr>
+        </p:nvSpPr>
+        <p:spPr/>
+        <p:txBody>
+          <a:bodyPr/>
+          <a:lstStyle/>
+          <a:p>
+            <a:r>
+              <a:rPr sz="1300"/>
+              <a:t>ВИДОВЕ ДОКУМЕНТАЦИЯ (3 мин.)</a:t>
+            </a:r>
+          </a:p>
+          <a:p>
+            <a:r>
+              <a:rPr sz="1300"/>
+              <a:t>Обяснете разликата с конкретен пример:</a:t>
+            </a:r>
+          </a:p>
+          <a:p>
+            <a:r>
+              <a:rPr sz="1300"/>
+              <a:t>  - Външна документация -&gt; README, ТЗ, архитектурна диаграма</a:t>
+            </a:r>
+          </a:p>
+          <a:p>
+            <a:r>
+              <a:rPr sz="1300"/>
+              <a:t>  - Вътрешна документация -&gt; коментар над метод, XML summary</a:t>
+            </a:r>
+          </a:p>
+          <a:p>
+            <a:r>
+              <a:rPr sz="1300"/>
+              <a:t>Въпрос: "Дайте пример за документ, който НЕ е в кода." (отговори: ТЗ, диаграми, ръководство)</a:t>
+            </a:r>
+          </a:p>
+          <a:p>
+            <a:r>
+              <a:rPr sz="1300"/>
+              <a:t>Подчертайте: "Вътрешната документация е тази, за която е отговорен ПРОГРАМИСТЪТ."</a:t>
+            </a:r>
+          </a:p>
+        </p:txBody>
+      </p:sp>
+      <p:sp>
+        <p:nvSpPr>
+          <p:cNvPr id="4" name="Slide Number Placeholder 3"/>
+          <p:cNvSpPr>
+            <a:spLocks noGrp="1"/>
+          </p:cNvSpPr>
+          <p:nvPr>
+            <p:ph type="sldNum" idx="5" sz="quarter"/>
+          </p:nvPr>
+        </p:nvSpPr>
+        <p:spPr/>
+      </p:sp>
+    </p:spTree>
+  </p:cSld>
+  <p:clrMapOvr>
+    <a:masterClrMapping/>
+  </p:clrMapOvr>
+</p:notes>
+</file>
+
+<file path=ppt/notesSlides/notesSlide9.xml><?xml version="1.0" encoding="utf-8"?>
+<p:notes xmlns:a="http://schemas.openxmlformats.org/drawingml/2006/main" xmlns:p="http://schemas.openxmlformats.org/presentationml/2006/main" xmlns:r="http://schemas.openxmlformats.org/officeDocument/2006/relationships">
+  <p:cSld>
+    <p:spTree>
+      <p:nvGrpSpPr>
+        <p:cNvPr id="1" name=""/>
+        <p:cNvGrpSpPr/>
+        <p:nvPr/>
+      </p:nvGrpSpPr>
+      <p:grpSpPr>
+        <a:xfrm>
+          <a:off x="0" y="0"/>
+          <a:ext cx="0" cy="0"/>
+          <a:chOff x="0" y="0"/>
+          <a:chExt cx="0" cy="0"/>
+        </a:xfrm>
+      </p:grpSpPr>
+      <p:sp>
+        <p:nvSpPr>
+          <p:cNvPr id="2" name="Slide Image Placeholder 1"/>
+          <p:cNvSpPr>
+            <a:spLocks noGrp="1"/>
+          </p:cNvSpPr>
+          <p:nvPr>
+            <p:ph type="sldImg" idx="2"/>
+          </p:nvPr>
+        </p:nvSpPr>
+        <p:spPr/>
+      </p:sp>
+      <p:sp>
+        <p:nvSpPr>
+          <p:cNvPr id="3" name="Notes Placeholder 2"/>
+          <p:cNvSpPr>
+            <a:spLocks noGrp="1"/>
+          </p:cNvSpPr>
+          <p:nvPr>
+            <p:ph type="body" idx="3" sz="quarter"/>
+          </p:nvPr>
+        </p:nvSpPr>
+        <p:spPr/>
+        <p:txBody>
+          <a:bodyPr/>
+          <a:lstStyle/>
+          <a:p>
+            <a:r>
+              <a:rPr sz="1300"/>
+              <a:t>ЛОШ КОД С ОЧЕВИДНИ КОМЕНТАРИ - Ч.1 (2 мин.)</a:t>
+            </a:r>
+          </a:p>
+          <a:p>
+            <a:r>
+              <a:rPr sz="1300"/>
+              <a:t>Покажете кода и ИЗЧАКАЙТЕ учениците да го прочетат мълчаливо (15-20 сек.).</a:t>
+            </a:r>
+          </a:p>
+          <a:p>
+            <a:r>
+              <a:rPr sz="1300"/>
+              <a:t>После попитайте: "Какво правят тези коментари? Казват ли нещо ново?"</a:t>
+            </a:r>
+          </a:p>
+          <a:p>
+            <a:r>
+              <a:rPr sz="1300"/>
+              <a:t>Насочете: "Ако изтрием всички коментари, ще разберем ли кода по-зле?"</a:t>
+            </a:r>
+          </a:p>
+          <a:p>
+            <a:r>
+              <a:rPr sz="1300"/>
+              <a:t>Оставете ги да отговорят: НЕ - защото коментарите само повтарят кода.</a:t>
+            </a:r>
+          </a:p>
+        </p:txBody>
+      </p:sp>
+      <p:sp>
+        <p:nvSpPr>
+          <p:cNvPr id="4" name="Slide Number Placeholder 3"/>
+          <p:cNvSpPr>
+            <a:spLocks noGrp="1"/>
+          </p:cNvSpPr>
+          <p:nvPr>
+            <p:ph type="sldNum" idx="5" sz="quarter"/>
+          </p:nvPr>
+        </p:nvSpPr>
+        <p:spPr/>
+      </p:sp>
+    </p:spTree>
   </p:cSld>
   <p:clrMapOvr>
     <a:masterClrMapping/>
